--- a/14.class_and_objects/OOP_Part3_PPT1.pptx
+++ b/14.class_and_objects/OOP_Part3_PPT1.pptx
@@ -86,218 +86,17 @@
             <a:noAutofit/>
           </a:bodyPr>
           <a:p>
-            <a:r>
-              <a:rPr b="0" lang="en-IN" sz="1800" spc="-1" strike="noStrike">
-                <a:solidFill>
-                  <a:srgbClr val="000000"/>
-                </a:solidFill>
-                <a:latin typeface="Calibri"/>
-              </a:rPr>
-              <a:t>C</a:t>
-            </a:r>
-            <a:r>
-              <a:rPr b="0" lang="en-IN" sz="1800" spc="-1" strike="noStrike">
-                <a:solidFill>
-                  <a:srgbClr val="000000"/>
-                </a:solidFill>
-                <a:latin typeface="Calibri"/>
-              </a:rPr>
-              <a:t>l</a:t>
-            </a:r>
-            <a:r>
-              <a:rPr b="0" lang="en-IN" sz="1800" spc="-1" strike="noStrike">
-                <a:solidFill>
-                  <a:srgbClr val="000000"/>
-                </a:solidFill>
-                <a:latin typeface="Calibri"/>
-              </a:rPr>
-              <a:t>i</a:t>
-            </a:r>
-            <a:r>
-              <a:rPr b="0" lang="en-IN" sz="1800" spc="-1" strike="noStrike">
-                <a:solidFill>
-                  <a:srgbClr val="000000"/>
-                </a:solidFill>
-                <a:latin typeface="Calibri"/>
-              </a:rPr>
-              <a:t>c</a:t>
-            </a:r>
-            <a:r>
-              <a:rPr b="0" lang="en-IN" sz="1800" spc="-1" strike="noStrike">
-                <a:solidFill>
-                  <a:srgbClr val="000000"/>
-                </a:solidFill>
-                <a:latin typeface="Calibri"/>
-              </a:rPr>
-              <a:t>k</a:t>
-            </a:r>
-            <a:r>
-              <a:rPr b="0" lang="en-IN" sz="1800" spc="-1" strike="noStrike">
-                <a:solidFill>
-                  <a:srgbClr val="000000"/>
-                </a:solidFill>
-                <a:latin typeface="Calibri"/>
-              </a:rPr>
-              <a:t> </a:t>
-            </a:r>
-            <a:r>
-              <a:rPr b="0" lang="en-IN" sz="1800" spc="-1" strike="noStrike">
-                <a:solidFill>
-                  <a:srgbClr val="000000"/>
-                </a:solidFill>
-                <a:latin typeface="Calibri"/>
-              </a:rPr>
-              <a:t>t</a:t>
-            </a:r>
-            <a:r>
-              <a:rPr b="0" lang="en-IN" sz="1800" spc="-1" strike="noStrike">
-                <a:solidFill>
-                  <a:srgbClr val="000000"/>
-                </a:solidFill>
-                <a:latin typeface="Calibri"/>
-              </a:rPr>
-              <a:t>o</a:t>
-            </a:r>
-            <a:r>
-              <a:rPr b="0" lang="en-IN" sz="1800" spc="-1" strike="noStrike">
-                <a:solidFill>
-                  <a:srgbClr val="000000"/>
-                </a:solidFill>
-                <a:latin typeface="Calibri"/>
-              </a:rPr>
-              <a:t> </a:t>
-            </a:r>
-            <a:r>
-              <a:rPr b="0" lang="en-IN" sz="1800" spc="-1" strike="noStrike">
-                <a:solidFill>
-                  <a:srgbClr val="000000"/>
-                </a:solidFill>
-                <a:latin typeface="Calibri"/>
-              </a:rPr>
-              <a:t>m</a:t>
-            </a:r>
-            <a:r>
-              <a:rPr b="0" lang="en-IN" sz="1800" spc="-1" strike="noStrike">
-                <a:solidFill>
-                  <a:srgbClr val="000000"/>
-                </a:solidFill>
-                <a:latin typeface="Calibri"/>
-              </a:rPr>
-              <a:t>o</a:t>
-            </a:r>
-            <a:r>
-              <a:rPr b="0" lang="en-IN" sz="1800" spc="-1" strike="noStrike">
-                <a:solidFill>
-                  <a:srgbClr val="000000"/>
-                </a:solidFill>
-                <a:latin typeface="Calibri"/>
-              </a:rPr>
-              <a:t>v</a:t>
-            </a:r>
-            <a:r>
-              <a:rPr b="0" lang="en-IN" sz="1800" spc="-1" strike="noStrike">
-                <a:solidFill>
-                  <a:srgbClr val="000000"/>
-                </a:solidFill>
-                <a:latin typeface="Calibri"/>
-              </a:rPr>
-              <a:t>e</a:t>
-            </a:r>
-            <a:r>
-              <a:rPr b="0" lang="en-IN" sz="1800" spc="-1" strike="noStrike">
-                <a:solidFill>
-                  <a:srgbClr val="000000"/>
-                </a:solidFill>
-                <a:latin typeface="Calibri"/>
-              </a:rPr>
-              <a:t> </a:t>
-            </a:r>
-            <a:r>
-              <a:rPr b="0" lang="en-IN" sz="1800" spc="-1" strike="noStrike">
-                <a:solidFill>
-                  <a:srgbClr val="000000"/>
-                </a:solidFill>
-                <a:latin typeface="Calibri"/>
-              </a:rPr>
-              <a:t>t</a:t>
-            </a:r>
-            <a:r>
-              <a:rPr b="0" lang="en-IN" sz="1800" spc="-1" strike="noStrike">
-                <a:solidFill>
-                  <a:srgbClr val="000000"/>
-                </a:solidFill>
-                <a:latin typeface="Calibri"/>
-              </a:rPr>
-              <a:t>h</a:t>
-            </a:r>
-            <a:r>
-              <a:rPr b="0" lang="en-IN" sz="1800" spc="-1" strike="noStrike">
-                <a:solidFill>
-                  <a:srgbClr val="000000"/>
-                </a:solidFill>
-                <a:latin typeface="Calibri"/>
-              </a:rPr>
-              <a:t>e</a:t>
-            </a:r>
-            <a:r>
-              <a:rPr b="0" lang="en-IN" sz="1800" spc="-1" strike="noStrike">
-                <a:solidFill>
-                  <a:srgbClr val="000000"/>
-                </a:solidFill>
-                <a:latin typeface="Calibri"/>
-              </a:rPr>
-              <a:t> </a:t>
-            </a:r>
-            <a:r>
-              <a:rPr b="0" lang="en-IN" sz="1800" spc="-1" strike="noStrike">
-                <a:solidFill>
-                  <a:srgbClr val="000000"/>
-                </a:solidFill>
-                <a:latin typeface="Calibri"/>
-              </a:rPr>
-              <a:t>s</a:t>
-            </a:r>
-            <a:r>
-              <a:rPr b="0" lang="en-IN" sz="1800" spc="-1" strike="noStrike">
-                <a:solidFill>
-                  <a:srgbClr val="000000"/>
-                </a:solidFill>
-                <a:latin typeface="Calibri"/>
-              </a:rPr>
-              <a:t>l</a:t>
-            </a:r>
-            <a:r>
-              <a:rPr b="0" lang="en-IN" sz="1800" spc="-1" strike="noStrike">
-                <a:solidFill>
-                  <a:srgbClr val="000000"/>
-                </a:solidFill>
-                <a:latin typeface="Calibri"/>
-              </a:rPr>
-              <a:t>i</a:t>
-            </a:r>
-            <a:r>
-              <a:rPr b="0" lang="en-IN" sz="1800" spc="-1" strike="noStrike">
-                <a:solidFill>
-                  <a:srgbClr val="000000"/>
-                </a:solidFill>
-                <a:latin typeface="Calibri"/>
-              </a:rPr>
-              <a:t>d</a:t>
-            </a:r>
-            <a:r>
-              <a:rPr b="0" lang="en-IN" sz="1800" spc="-1" strike="noStrike">
-                <a:solidFill>
-                  <a:srgbClr val="000000"/>
-                </a:solidFill>
-                <a:latin typeface="Calibri"/>
-              </a:rPr>
-              <a:t>e</a:t>
-            </a:r>
-            <a:endParaRPr b="0" lang="en-IN" sz="1800" spc="-1" strike="noStrike">
-              <a:solidFill>
-                <a:srgbClr val="000000"/>
-              </a:solidFill>
-              <a:latin typeface="Calibri"/>
+            <a:pPr algn="ctr">
+              <a:buNone/>
+            </a:pPr>
+            <a:r>
+              <a:rPr b="0" lang="en-IN" sz="4400" spc="-1" strike="noStrike">
+                <a:latin typeface="Arial"/>
+              </a:rPr>
+              <a:t>Click to move the slide</a:t>
+            </a:r>
+            <a:endParaRPr b="0" lang="en-IN" sz="4400" spc="-1" strike="noStrike">
+              <a:latin typeface="Arial"/>
             </a:endParaRPr>
           </a:p>
         </p:txBody>
@@ -519,7 +318,7 @@
             <a:pPr algn="r">
               <a:buNone/>
             </a:pPr>
-            <a:fld id="{D68075A2-308B-4692-B094-E04BFA2B44CB}" type="slidenum">
+            <a:fld id="{16907708-92E3-40D7-BC3D-23BD61A5FDC8}" type="slidenum">
               <a:rPr b="0" lang="en-IN" sz="1400" spc="-1" strike="noStrike">
                 <a:latin typeface="Times New Roman"/>
               </a:rPr>
@@ -567,7 +366,7 @@
         <p:spPr>
           <a:xfrm>
             <a:off x="685800" y="1143000"/>
-            <a:ext cx="5486040" cy="3085920"/>
+            <a:ext cx="5485680" cy="3085560"/>
           </a:xfrm>
           <a:prstGeom prst="rect">
             <a:avLst/>
@@ -590,7 +389,7 @@
         <p:spPr>
           <a:xfrm>
             <a:off x="685800" y="4400640"/>
-            <a:ext cx="5486040" cy="3600000"/>
+            <a:ext cx="5485680" cy="3599640"/>
           </a:xfrm>
           <a:prstGeom prst="rect">
             <a:avLst/>
@@ -601,7 +400,7 @@
           </a:ln>
         </p:spPr>
         <p:txBody>
-          <a:bodyPr anchor="t">
+          <a:bodyPr lIns="0" rIns="0" tIns="0" bIns="0" anchor="t">
             <a:noAutofit/>
           </a:bodyPr>
           <a:p>
@@ -624,7 +423,7 @@
         <p:spPr>
           <a:xfrm>
             <a:off x="3884760" y="8685360"/>
-            <a:ext cx="2971440" cy="458280"/>
+            <a:ext cx="2971080" cy="457920"/>
           </a:xfrm>
           <a:prstGeom prst="rect">
             <a:avLst/>
@@ -635,7 +434,7 @@
           </a:ln>
         </p:spPr>
         <p:txBody>
-          <a:bodyPr anchor="b">
+          <a:bodyPr lIns="0" rIns="0" tIns="0" bIns="0" anchor="b">
             <a:noAutofit/>
           </a:bodyPr>
           <a:lstStyle>
@@ -660,7 +459,7 @@
               </a:lnSpc>
               <a:buNone/>
             </a:pPr>
-            <a:fld id="{CD57B0CB-11C3-4BDB-8EC4-CF2489C1F039}" type="slidenum">
+            <a:fld id="{5E15F2F0-3368-4B2E-BB99-DEC3389A5B8F}" type="slidenum">
               <a:rPr b="0" lang="en-US" sz="1200" spc="-1" strike="noStrike">
                 <a:solidFill>
                   <a:srgbClr val="000000"/>
@@ -711,7 +510,7 @@
         <p:spPr>
           <a:xfrm>
             <a:off x="685800" y="1143000"/>
-            <a:ext cx="5486040" cy="3085920"/>
+            <a:ext cx="5485680" cy="3085560"/>
           </a:xfrm>
           <a:prstGeom prst="rect">
             <a:avLst/>
@@ -734,7 +533,7 @@
         <p:spPr>
           <a:xfrm>
             <a:off x="685800" y="4400640"/>
-            <a:ext cx="5486040" cy="3600000"/>
+            <a:ext cx="5485680" cy="3599640"/>
           </a:xfrm>
           <a:prstGeom prst="rect">
             <a:avLst/>
@@ -745,7 +544,7 @@
           </a:ln>
         </p:spPr>
         <p:txBody>
-          <a:bodyPr anchor="t">
+          <a:bodyPr lIns="0" rIns="0" tIns="0" bIns="0" anchor="t">
             <a:noAutofit/>
           </a:bodyPr>
           <a:p>
@@ -768,7 +567,7 @@
         <p:spPr>
           <a:xfrm>
             <a:off x="3884760" y="8685360"/>
-            <a:ext cx="2971440" cy="458280"/>
+            <a:ext cx="2971080" cy="457920"/>
           </a:xfrm>
           <a:prstGeom prst="rect">
             <a:avLst/>
@@ -779,7 +578,7 @@
           </a:ln>
         </p:spPr>
         <p:txBody>
-          <a:bodyPr anchor="b">
+          <a:bodyPr lIns="0" rIns="0" tIns="0" bIns="0" anchor="b">
             <a:noAutofit/>
           </a:bodyPr>
           <a:lstStyle>
@@ -804,7 +603,7 @@
               </a:lnSpc>
               <a:buNone/>
             </a:pPr>
-            <a:fld id="{673ADA5F-953B-4D5E-BA6D-8EA47E0970A0}" type="slidenum">
+            <a:fld id="{883FB626-8026-4A95-9360-E571516AF602}" type="slidenum">
               <a:rPr b="0" lang="en-US" sz="1200" spc="-1" strike="noStrike">
                 <a:solidFill>
                   <a:srgbClr val="000000"/>
@@ -855,7 +654,7 @@
         <p:spPr>
           <a:xfrm>
             <a:off x="685800" y="1143000"/>
-            <a:ext cx="5486040" cy="3085920"/>
+            <a:ext cx="5485680" cy="3085560"/>
           </a:xfrm>
           <a:prstGeom prst="rect">
             <a:avLst/>
@@ -878,7 +677,7 @@
         <p:spPr>
           <a:xfrm>
             <a:off x="685800" y="4400640"/>
-            <a:ext cx="5486040" cy="3600000"/>
+            <a:ext cx="5485680" cy="3599640"/>
           </a:xfrm>
           <a:prstGeom prst="rect">
             <a:avLst/>
@@ -889,7 +688,7 @@
           </a:ln>
         </p:spPr>
         <p:txBody>
-          <a:bodyPr anchor="t">
+          <a:bodyPr lIns="0" rIns="0" tIns="0" bIns="0" anchor="t">
             <a:noAutofit/>
           </a:bodyPr>
           <a:p>
@@ -912,7 +711,7 @@
         <p:spPr>
           <a:xfrm>
             <a:off x="3884760" y="8685360"/>
-            <a:ext cx="2971440" cy="458280"/>
+            <a:ext cx="2971080" cy="457920"/>
           </a:xfrm>
           <a:prstGeom prst="rect">
             <a:avLst/>
@@ -923,7 +722,7 @@
           </a:ln>
         </p:spPr>
         <p:txBody>
-          <a:bodyPr anchor="b">
+          <a:bodyPr lIns="0" rIns="0" tIns="0" bIns="0" anchor="b">
             <a:noAutofit/>
           </a:bodyPr>
           <a:lstStyle>
@@ -948,7 +747,7 @@
               </a:lnSpc>
               <a:buNone/>
             </a:pPr>
-            <a:fld id="{E484F4E1-0E38-409C-9591-619A4172DDB0}" type="slidenum">
+            <a:fld id="{DC86C703-058D-4C60-96BC-98F267007D3B}" type="slidenum">
               <a:rPr b="0" lang="en-US" sz="1200" spc="-1" strike="noStrike">
                 <a:solidFill>
                   <a:srgbClr val="000000"/>
@@ -999,7 +798,7 @@
         <p:spPr>
           <a:xfrm>
             <a:off x="685800" y="1143000"/>
-            <a:ext cx="5486040" cy="3085920"/>
+            <a:ext cx="5485680" cy="3085560"/>
           </a:xfrm>
           <a:prstGeom prst="rect">
             <a:avLst/>
@@ -1022,7 +821,7 @@
         <p:spPr>
           <a:xfrm>
             <a:off x="685800" y="4400640"/>
-            <a:ext cx="5486040" cy="3600000"/>
+            <a:ext cx="5485680" cy="3599640"/>
           </a:xfrm>
           <a:prstGeom prst="rect">
             <a:avLst/>
@@ -1033,7 +832,7 @@
           </a:ln>
         </p:spPr>
         <p:txBody>
-          <a:bodyPr anchor="t">
+          <a:bodyPr lIns="0" rIns="0" tIns="0" bIns="0" anchor="t">
             <a:noAutofit/>
           </a:bodyPr>
           <a:p>
@@ -1056,7 +855,7 @@
         <p:spPr>
           <a:xfrm>
             <a:off x="3884760" y="8685360"/>
-            <a:ext cx="2971440" cy="458280"/>
+            <a:ext cx="2971080" cy="457920"/>
           </a:xfrm>
           <a:prstGeom prst="rect">
             <a:avLst/>
@@ -1067,7 +866,7 @@
           </a:ln>
         </p:spPr>
         <p:txBody>
-          <a:bodyPr anchor="b">
+          <a:bodyPr lIns="0" rIns="0" tIns="0" bIns="0" anchor="b">
             <a:noAutofit/>
           </a:bodyPr>
           <a:lstStyle>
@@ -1092,7 +891,7 @@
               </a:lnSpc>
               <a:buNone/>
             </a:pPr>
-            <a:fld id="{A56FFE2F-9C15-4992-A0DF-0A83E41EB8C1}" type="slidenum">
+            <a:fld id="{A0385764-C2C1-46C1-8BF1-C2AD1896DA70}" type="slidenum">
               <a:rPr b="0" lang="en-US" sz="1200" spc="-1" strike="noStrike">
                 <a:solidFill>
                   <a:srgbClr val="000000"/>
@@ -1143,7 +942,7 @@
         <p:spPr>
           <a:xfrm>
             <a:off x="685800" y="1143000"/>
-            <a:ext cx="5486040" cy="3085920"/>
+            <a:ext cx="5485680" cy="3085560"/>
           </a:xfrm>
           <a:prstGeom prst="rect">
             <a:avLst/>
@@ -1166,7 +965,7 @@
         <p:spPr>
           <a:xfrm>
             <a:off x="685800" y="4400640"/>
-            <a:ext cx="5486040" cy="3600000"/>
+            <a:ext cx="5485680" cy="3599640"/>
           </a:xfrm>
           <a:prstGeom prst="rect">
             <a:avLst/>
@@ -1177,7 +976,7 @@
           </a:ln>
         </p:spPr>
         <p:txBody>
-          <a:bodyPr anchor="t">
+          <a:bodyPr lIns="0" rIns="0" tIns="0" bIns="0" anchor="t">
             <a:noAutofit/>
           </a:bodyPr>
           <a:p>
@@ -1200,7 +999,7 @@
         <p:spPr>
           <a:xfrm>
             <a:off x="3884760" y="8685360"/>
-            <a:ext cx="2971440" cy="458280"/>
+            <a:ext cx="2971080" cy="457920"/>
           </a:xfrm>
           <a:prstGeom prst="rect">
             <a:avLst/>
@@ -1211,7 +1010,7 @@
           </a:ln>
         </p:spPr>
         <p:txBody>
-          <a:bodyPr anchor="b">
+          <a:bodyPr lIns="0" rIns="0" tIns="0" bIns="0" anchor="b">
             <a:noAutofit/>
           </a:bodyPr>
           <a:lstStyle>
@@ -1236,7 +1035,7 @@
               </a:lnSpc>
               <a:buNone/>
             </a:pPr>
-            <a:fld id="{2A342C69-BA66-4421-A96E-3BBDEEB14AD8}" type="slidenum">
+            <a:fld id="{251FEA65-32EE-4170-B3F5-9760BEBEC483}" type="slidenum">
               <a:rPr b="0" lang="en-US" sz="1200" spc="-1" strike="noStrike">
                 <a:solidFill>
                   <a:srgbClr val="000000"/>
@@ -1287,7 +1086,7 @@
         <p:spPr>
           <a:xfrm>
             <a:off x="685800" y="1143000"/>
-            <a:ext cx="5486040" cy="3085920"/>
+            <a:ext cx="5485680" cy="3085560"/>
           </a:xfrm>
           <a:prstGeom prst="rect">
             <a:avLst/>
@@ -1310,7 +1109,7 @@
         <p:spPr>
           <a:xfrm>
             <a:off x="685800" y="4400640"/>
-            <a:ext cx="5486040" cy="3600000"/>
+            <a:ext cx="5485680" cy="3599640"/>
           </a:xfrm>
           <a:prstGeom prst="rect">
             <a:avLst/>
@@ -1321,7 +1120,7 @@
           </a:ln>
         </p:spPr>
         <p:txBody>
-          <a:bodyPr anchor="t">
+          <a:bodyPr lIns="0" rIns="0" tIns="0" bIns="0" anchor="t">
             <a:noAutofit/>
           </a:bodyPr>
           <a:p>
@@ -1344,7 +1143,7 @@
         <p:spPr>
           <a:xfrm>
             <a:off x="3884760" y="8685360"/>
-            <a:ext cx="2971440" cy="458280"/>
+            <a:ext cx="2971080" cy="457920"/>
           </a:xfrm>
           <a:prstGeom prst="rect">
             <a:avLst/>
@@ -1355,7 +1154,7 @@
           </a:ln>
         </p:spPr>
         <p:txBody>
-          <a:bodyPr anchor="b">
+          <a:bodyPr lIns="0" rIns="0" tIns="0" bIns="0" anchor="b">
             <a:noAutofit/>
           </a:bodyPr>
           <a:lstStyle>
@@ -1380,7 +1179,7 @@
               </a:lnSpc>
               <a:buNone/>
             </a:pPr>
-            <a:fld id="{8376ACE2-7255-45B4-A3C4-465B440192E9}" type="slidenum">
+            <a:fld id="{C0BB492D-C2CC-4155-A7E1-3702DF029B30}" type="slidenum">
               <a:rPr b="0" lang="en-US" sz="1200" spc="-1" strike="noStrike">
                 <a:solidFill>
                   <a:srgbClr val="000000"/>
@@ -1431,7 +1230,7 @@
         <p:spPr>
           <a:xfrm>
             <a:off x="685800" y="1143000"/>
-            <a:ext cx="5486040" cy="3085920"/>
+            <a:ext cx="5485680" cy="3085560"/>
           </a:xfrm>
           <a:prstGeom prst="rect">
             <a:avLst/>
@@ -1454,7 +1253,7 @@
         <p:spPr>
           <a:xfrm>
             <a:off x="685800" y="4400640"/>
-            <a:ext cx="5486040" cy="3600000"/>
+            <a:ext cx="5485680" cy="3599640"/>
           </a:xfrm>
           <a:prstGeom prst="rect">
             <a:avLst/>
@@ -1465,7 +1264,7 @@
           </a:ln>
         </p:spPr>
         <p:txBody>
-          <a:bodyPr anchor="t">
+          <a:bodyPr lIns="0" rIns="0" tIns="0" bIns="0" anchor="t">
             <a:noAutofit/>
           </a:bodyPr>
           <a:p>
@@ -1488,7 +1287,7 @@
         <p:spPr>
           <a:xfrm>
             <a:off x="3884760" y="8685360"/>
-            <a:ext cx="2971440" cy="458280"/>
+            <a:ext cx="2971080" cy="457920"/>
           </a:xfrm>
           <a:prstGeom prst="rect">
             <a:avLst/>
@@ -1499,7 +1298,7 @@
           </a:ln>
         </p:spPr>
         <p:txBody>
-          <a:bodyPr anchor="b">
+          <a:bodyPr lIns="0" rIns="0" tIns="0" bIns="0" anchor="b">
             <a:noAutofit/>
           </a:bodyPr>
           <a:lstStyle>
@@ -1524,7 +1323,7 @@
               </a:lnSpc>
               <a:buNone/>
             </a:pPr>
-            <a:fld id="{5C4FE730-9847-48CB-AF64-B594EA50D6AC}" type="slidenum">
+            <a:fld id="{2B20C9FA-D40E-4F54-B218-555D2B674DE9}" type="slidenum">
               <a:rPr b="0" lang="en-US" sz="1200" spc="-1" strike="noStrike">
                 <a:solidFill>
                   <a:srgbClr val="000000"/>
@@ -1575,7 +1374,7 @@
         <p:spPr>
           <a:xfrm>
             <a:off x="685800" y="1143000"/>
-            <a:ext cx="5486040" cy="3085920"/>
+            <a:ext cx="5485680" cy="3085560"/>
           </a:xfrm>
           <a:prstGeom prst="rect">
             <a:avLst/>
@@ -1598,7 +1397,7 @@
         <p:spPr>
           <a:xfrm>
             <a:off x="685800" y="4400640"/>
-            <a:ext cx="5486040" cy="3600000"/>
+            <a:ext cx="5485680" cy="3599640"/>
           </a:xfrm>
           <a:prstGeom prst="rect">
             <a:avLst/>
@@ -1609,7 +1408,7 @@
           </a:ln>
         </p:spPr>
         <p:txBody>
-          <a:bodyPr anchor="t">
+          <a:bodyPr lIns="0" rIns="0" tIns="0" bIns="0" anchor="t">
             <a:noAutofit/>
           </a:bodyPr>
           <a:p>
@@ -1632,7 +1431,7 @@
         <p:spPr>
           <a:xfrm>
             <a:off x="3884760" y="8685360"/>
-            <a:ext cx="2971440" cy="458280"/>
+            <a:ext cx="2971080" cy="457920"/>
           </a:xfrm>
           <a:prstGeom prst="rect">
             <a:avLst/>
@@ -1643,7 +1442,7 @@
           </a:ln>
         </p:spPr>
         <p:txBody>
-          <a:bodyPr anchor="b">
+          <a:bodyPr lIns="0" rIns="0" tIns="0" bIns="0" anchor="b">
             <a:noAutofit/>
           </a:bodyPr>
           <a:lstStyle>
@@ -1668,7 +1467,7 @@
               </a:lnSpc>
               <a:buNone/>
             </a:pPr>
-            <a:fld id="{CFB2D7A7-5E62-48A0-B6D6-D09074903999}" type="slidenum">
+            <a:fld id="{D02C3DFF-D298-4DAA-8DFB-19AC7139D071}" type="slidenum">
               <a:rPr b="0" lang="en-US" sz="1200" spc="-1" strike="noStrike">
                 <a:solidFill>
                   <a:srgbClr val="000000"/>
@@ -1719,7 +1518,7 @@
         <p:spPr>
           <a:xfrm>
             <a:off x="685800" y="1143000"/>
-            <a:ext cx="5486040" cy="3085920"/>
+            <a:ext cx="5485680" cy="3085560"/>
           </a:xfrm>
           <a:prstGeom prst="rect">
             <a:avLst/>
@@ -1742,7 +1541,7 @@
         <p:spPr>
           <a:xfrm>
             <a:off x="685800" y="4400640"/>
-            <a:ext cx="5486040" cy="3600000"/>
+            <a:ext cx="5485680" cy="3599640"/>
           </a:xfrm>
           <a:prstGeom prst="rect">
             <a:avLst/>
@@ -1753,7 +1552,7 @@
           </a:ln>
         </p:spPr>
         <p:txBody>
-          <a:bodyPr anchor="t">
+          <a:bodyPr lIns="0" rIns="0" tIns="0" bIns="0" anchor="t">
             <a:noAutofit/>
           </a:bodyPr>
           <a:p>
@@ -1776,7 +1575,7 @@
         <p:spPr>
           <a:xfrm>
             <a:off x="3884760" y="8685360"/>
-            <a:ext cx="2971440" cy="458280"/>
+            <a:ext cx="2971080" cy="457920"/>
           </a:xfrm>
           <a:prstGeom prst="rect">
             <a:avLst/>
@@ -1787,7 +1586,7 @@
           </a:ln>
         </p:spPr>
         <p:txBody>
-          <a:bodyPr anchor="b">
+          <a:bodyPr lIns="0" rIns="0" tIns="0" bIns="0" anchor="b">
             <a:noAutofit/>
           </a:bodyPr>
           <a:lstStyle>
@@ -1812,7 +1611,7 @@
               </a:lnSpc>
               <a:buNone/>
             </a:pPr>
-            <a:fld id="{8C7CF9D4-5487-4D3D-B89B-5137752D7058}" type="slidenum">
+            <a:fld id="{A7D4CB03-EE46-432B-BB4D-D4B05B0786FD}" type="slidenum">
               <a:rPr b="0" lang="en-US" sz="1200" spc="-1" strike="noStrike">
                 <a:solidFill>
                   <a:srgbClr val="000000"/>
@@ -1863,7 +1662,7 @@
         <p:spPr>
           <a:xfrm>
             <a:off x="685800" y="1143000"/>
-            <a:ext cx="5486040" cy="3085920"/>
+            <a:ext cx="5485680" cy="3085560"/>
           </a:xfrm>
           <a:prstGeom prst="rect">
             <a:avLst/>
@@ -1886,7 +1685,7 @@
         <p:spPr>
           <a:xfrm>
             <a:off x="685800" y="4400640"/>
-            <a:ext cx="5486040" cy="3600000"/>
+            <a:ext cx="5485680" cy="3599640"/>
           </a:xfrm>
           <a:prstGeom prst="rect">
             <a:avLst/>
@@ -1897,7 +1696,7 @@
           </a:ln>
         </p:spPr>
         <p:txBody>
-          <a:bodyPr anchor="t">
+          <a:bodyPr lIns="0" rIns="0" tIns="0" bIns="0" anchor="t">
             <a:noAutofit/>
           </a:bodyPr>
           <a:p>
@@ -1920,7 +1719,7 @@
         <p:spPr>
           <a:xfrm>
             <a:off x="3884760" y="8685360"/>
-            <a:ext cx="2971440" cy="458280"/>
+            <a:ext cx="2971080" cy="457920"/>
           </a:xfrm>
           <a:prstGeom prst="rect">
             <a:avLst/>
@@ -1931,7 +1730,7 @@
           </a:ln>
         </p:spPr>
         <p:txBody>
-          <a:bodyPr anchor="b">
+          <a:bodyPr lIns="0" rIns="0" tIns="0" bIns="0" anchor="b">
             <a:noAutofit/>
           </a:bodyPr>
           <a:lstStyle>
@@ -1956,7 +1755,7 @@
               </a:lnSpc>
               <a:buNone/>
             </a:pPr>
-            <a:fld id="{F2134B0A-BB36-43CA-8D26-A064FCA26C8F}" type="slidenum">
+            <a:fld id="{B94DC0C5-7A21-47D7-B0C5-EA85239DA3E2}" type="slidenum">
               <a:rPr b="0" lang="en-US" sz="1200" spc="-1" strike="noStrike">
                 <a:solidFill>
                   <a:srgbClr val="000000"/>
@@ -2007,7 +1806,7 @@
         <p:spPr>
           <a:xfrm>
             <a:off x="685800" y="1143000"/>
-            <a:ext cx="5486040" cy="3085920"/>
+            <a:ext cx="5485680" cy="3085560"/>
           </a:xfrm>
           <a:prstGeom prst="rect">
             <a:avLst/>
@@ -2030,7 +1829,7 @@
         <p:spPr>
           <a:xfrm>
             <a:off x="685800" y="4400640"/>
-            <a:ext cx="5486040" cy="3600000"/>
+            <a:ext cx="5485680" cy="3599640"/>
           </a:xfrm>
           <a:prstGeom prst="rect">
             <a:avLst/>
@@ -2041,7 +1840,7 @@
           </a:ln>
         </p:spPr>
         <p:txBody>
-          <a:bodyPr anchor="t">
+          <a:bodyPr lIns="0" rIns="0" tIns="0" bIns="0" anchor="t">
             <a:noAutofit/>
           </a:bodyPr>
           <a:p>
@@ -2064,7 +1863,7 @@
         <p:spPr>
           <a:xfrm>
             <a:off x="3884760" y="8685360"/>
-            <a:ext cx="2971440" cy="458280"/>
+            <a:ext cx="2971080" cy="457920"/>
           </a:xfrm>
           <a:prstGeom prst="rect">
             <a:avLst/>
@@ -2075,7 +1874,7 @@
           </a:ln>
         </p:spPr>
         <p:txBody>
-          <a:bodyPr anchor="b">
+          <a:bodyPr lIns="0" rIns="0" tIns="0" bIns="0" anchor="b">
             <a:noAutofit/>
           </a:bodyPr>
           <a:lstStyle>
@@ -2100,7 +1899,7 @@
               </a:lnSpc>
               <a:buNone/>
             </a:pPr>
-            <a:fld id="{42FEC9B3-6271-4C82-BEFD-BC21B08CBF66}" type="slidenum">
+            <a:fld id="{5440C7F8-568E-4CE0-9591-C3B1CA081665}" type="slidenum">
               <a:rPr b="0" lang="en-US" sz="1200" spc="-1" strike="noStrike">
                 <a:solidFill>
                   <a:srgbClr val="000000"/>
@@ -2151,7 +1950,7 @@
         <p:spPr>
           <a:xfrm>
             <a:off x="685800" y="1143000"/>
-            <a:ext cx="5486040" cy="3085920"/>
+            <a:ext cx="5485680" cy="3085560"/>
           </a:xfrm>
           <a:prstGeom prst="rect">
             <a:avLst/>
@@ -2174,7 +1973,7 @@
         <p:spPr>
           <a:xfrm>
             <a:off x="685800" y="4400640"/>
-            <a:ext cx="5486040" cy="3600000"/>
+            <a:ext cx="5485680" cy="3599640"/>
           </a:xfrm>
           <a:prstGeom prst="rect">
             <a:avLst/>
@@ -2185,7 +1984,7 @@
           </a:ln>
         </p:spPr>
         <p:txBody>
-          <a:bodyPr anchor="t">
+          <a:bodyPr lIns="0" rIns="0" tIns="0" bIns="0" anchor="t">
             <a:noAutofit/>
           </a:bodyPr>
           <a:p>
@@ -2208,7 +2007,7 @@
         <p:spPr>
           <a:xfrm>
             <a:off x="3884760" y="8685360"/>
-            <a:ext cx="2971440" cy="458280"/>
+            <a:ext cx="2971080" cy="457920"/>
           </a:xfrm>
           <a:prstGeom prst="rect">
             <a:avLst/>
@@ -2219,7 +2018,7 @@
           </a:ln>
         </p:spPr>
         <p:txBody>
-          <a:bodyPr anchor="b">
+          <a:bodyPr lIns="0" rIns="0" tIns="0" bIns="0" anchor="b">
             <a:noAutofit/>
           </a:bodyPr>
           <a:lstStyle>
@@ -2244,7 +2043,7 @@
               </a:lnSpc>
               <a:buNone/>
             </a:pPr>
-            <a:fld id="{6D15543A-DAAF-468E-BF81-5C3C94CE36B1}" type="slidenum">
+            <a:fld id="{0C673128-CDA6-4E9F-B1BD-B4D61B5F26F7}" type="slidenum">
               <a:rPr b="0" lang="en-US" sz="1200" spc="-1" strike="noStrike">
                 <a:solidFill>
                   <a:srgbClr val="000000"/>
@@ -2295,7 +2094,7 @@
         <p:spPr>
           <a:xfrm>
             <a:off x="685800" y="1143000"/>
-            <a:ext cx="5486040" cy="3085920"/>
+            <a:ext cx="5485680" cy="3085560"/>
           </a:xfrm>
           <a:prstGeom prst="rect">
             <a:avLst/>
@@ -2318,7 +2117,7 @@
         <p:spPr>
           <a:xfrm>
             <a:off x="685800" y="4400640"/>
-            <a:ext cx="5486040" cy="3600000"/>
+            <a:ext cx="5485680" cy="3599640"/>
           </a:xfrm>
           <a:prstGeom prst="rect">
             <a:avLst/>
@@ -2329,7 +2128,7 @@
           </a:ln>
         </p:spPr>
         <p:txBody>
-          <a:bodyPr anchor="t">
+          <a:bodyPr lIns="0" rIns="0" tIns="0" bIns="0" anchor="t">
             <a:noAutofit/>
           </a:bodyPr>
           <a:p>
@@ -2352,7 +2151,7 @@
         <p:spPr>
           <a:xfrm>
             <a:off x="3884760" y="8685360"/>
-            <a:ext cx="2971440" cy="458280"/>
+            <a:ext cx="2971080" cy="457920"/>
           </a:xfrm>
           <a:prstGeom prst="rect">
             <a:avLst/>
@@ -2363,7 +2162,7 @@
           </a:ln>
         </p:spPr>
         <p:txBody>
-          <a:bodyPr anchor="b">
+          <a:bodyPr lIns="0" rIns="0" tIns="0" bIns="0" anchor="b">
             <a:noAutofit/>
           </a:bodyPr>
           <a:lstStyle>
@@ -2388,7 +2187,7 @@
               </a:lnSpc>
               <a:buNone/>
             </a:pPr>
-            <a:fld id="{B7846837-9F4D-459F-B436-FC4536AB4817}" type="slidenum">
+            <a:fld id="{EE9F046B-F4A7-43F8-AD1D-28256D2B6A02}" type="slidenum">
               <a:rPr b="0" lang="en-US" sz="1200" spc="-1" strike="noStrike">
                 <a:solidFill>
                   <a:srgbClr val="000000"/>
@@ -2439,7 +2238,7 @@
         <p:spPr>
           <a:xfrm>
             <a:off x="685800" y="1143000"/>
-            <a:ext cx="5486040" cy="3085920"/>
+            <a:ext cx="5485680" cy="3085560"/>
           </a:xfrm>
           <a:prstGeom prst="rect">
             <a:avLst/>
@@ -2462,7 +2261,7 @@
         <p:spPr>
           <a:xfrm>
             <a:off x="685800" y="4400640"/>
-            <a:ext cx="5486040" cy="3600000"/>
+            <a:ext cx="5485680" cy="3599640"/>
           </a:xfrm>
           <a:prstGeom prst="rect">
             <a:avLst/>
@@ -2473,7 +2272,7 @@
           </a:ln>
         </p:spPr>
         <p:txBody>
-          <a:bodyPr anchor="t">
+          <a:bodyPr lIns="0" rIns="0" tIns="0" bIns="0" anchor="t">
             <a:noAutofit/>
           </a:bodyPr>
           <a:p>
@@ -2496,7 +2295,7 @@
         <p:spPr>
           <a:xfrm>
             <a:off x="3884760" y="8685360"/>
-            <a:ext cx="2971440" cy="458280"/>
+            <a:ext cx="2971080" cy="457920"/>
           </a:xfrm>
           <a:prstGeom prst="rect">
             <a:avLst/>
@@ -2507,7 +2306,7 @@
           </a:ln>
         </p:spPr>
         <p:txBody>
-          <a:bodyPr anchor="b">
+          <a:bodyPr lIns="0" rIns="0" tIns="0" bIns="0" anchor="b">
             <a:noAutofit/>
           </a:bodyPr>
           <a:lstStyle>
@@ -2532,7 +2331,7 @@
               </a:lnSpc>
               <a:buNone/>
             </a:pPr>
-            <a:fld id="{3D1BEBD5-4CC9-4B7A-98CA-219CAD909691}" type="slidenum">
+            <a:fld id="{6CC12FA3-C2E6-4D62-BAD9-51044AF39816}" type="slidenum">
               <a:rPr b="0" lang="en-US" sz="1200" spc="-1" strike="noStrike">
                 <a:solidFill>
                   <a:srgbClr val="000000"/>
@@ -2583,7 +2382,7 @@
         <p:spPr>
           <a:xfrm>
             <a:off x="685800" y="1143000"/>
-            <a:ext cx="5486040" cy="3085920"/>
+            <a:ext cx="5485680" cy="3085560"/>
           </a:xfrm>
           <a:prstGeom prst="rect">
             <a:avLst/>
@@ -2606,7 +2405,7 @@
         <p:spPr>
           <a:xfrm>
             <a:off x="685800" y="4400640"/>
-            <a:ext cx="5486040" cy="3600000"/>
+            <a:ext cx="5485680" cy="3599640"/>
           </a:xfrm>
           <a:prstGeom prst="rect">
             <a:avLst/>
@@ -2617,7 +2416,7 @@
           </a:ln>
         </p:spPr>
         <p:txBody>
-          <a:bodyPr anchor="t">
+          <a:bodyPr lIns="0" rIns="0" tIns="0" bIns="0" anchor="t">
             <a:noAutofit/>
           </a:bodyPr>
           <a:p>
@@ -2640,7 +2439,7 @@
         <p:spPr>
           <a:xfrm>
             <a:off x="3884760" y="8685360"/>
-            <a:ext cx="2971440" cy="458280"/>
+            <a:ext cx="2971080" cy="457920"/>
           </a:xfrm>
           <a:prstGeom prst="rect">
             <a:avLst/>
@@ -2651,7 +2450,7 @@
           </a:ln>
         </p:spPr>
         <p:txBody>
-          <a:bodyPr anchor="b">
+          <a:bodyPr lIns="0" rIns="0" tIns="0" bIns="0" anchor="b">
             <a:noAutofit/>
           </a:bodyPr>
           <a:lstStyle>
@@ -2676,7 +2475,7 @@
               </a:lnSpc>
               <a:buNone/>
             </a:pPr>
-            <a:fld id="{9760172D-223D-4AE6-BA82-137E55FB31BD}" type="slidenum">
+            <a:fld id="{C5C808D7-1CC2-4D78-A375-9FDCCA5E6DFC}" type="slidenum">
               <a:rPr b="0" lang="en-US" sz="1200" spc="-1" strike="noStrike">
                 <a:solidFill>
                   <a:srgbClr val="000000"/>
@@ -2727,7 +2526,7 @@
         <p:spPr>
           <a:xfrm>
             <a:off x="685800" y="1143000"/>
-            <a:ext cx="5486040" cy="3085920"/>
+            <a:ext cx="5485680" cy="3085560"/>
           </a:xfrm>
           <a:prstGeom prst="rect">
             <a:avLst/>
@@ -2750,7 +2549,7 @@
         <p:spPr>
           <a:xfrm>
             <a:off x="685800" y="4400640"/>
-            <a:ext cx="5486040" cy="3600000"/>
+            <a:ext cx="5485680" cy="3599640"/>
           </a:xfrm>
           <a:prstGeom prst="rect">
             <a:avLst/>
@@ -2761,7 +2560,7 @@
           </a:ln>
         </p:spPr>
         <p:txBody>
-          <a:bodyPr anchor="t">
+          <a:bodyPr lIns="0" rIns="0" tIns="0" bIns="0" anchor="t">
             <a:noAutofit/>
           </a:bodyPr>
           <a:p>
@@ -2784,7 +2583,7 @@
         <p:spPr>
           <a:xfrm>
             <a:off x="3884760" y="8685360"/>
-            <a:ext cx="2971440" cy="458280"/>
+            <a:ext cx="2971080" cy="457920"/>
           </a:xfrm>
           <a:prstGeom prst="rect">
             <a:avLst/>
@@ -2795,7 +2594,7 @@
           </a:ln>
         </p:spPr>
         <p:txBody>
-          <a:bodyPr anchor="b">
+          <a:bodyPr lIns="0" rIns="0" tIns="0" bIns="0" anchor="b">
             <a:noAutofit/>
           </a:bodyPr>
           <a:lstStyle>
@@ -2820,7 +2619,7 @@
               </a:lnSpc>
               <a:buNone/>
             </a:pPr>
-            <a:fld id="{72478E72-0350-48ED-92DB-F0F752167A84}" type="slidenum">
+            <a:fld id="{71919381-2477-4591-8DD9-7C4C3D08BDE6}" type="slidenum">
               <a:rPr b="0" lang="en-US" sz="1200" spc="-1" strike="noStrike">
                 <a:solidFill>
                   <a:srgbClr val="000000"/>
@@ -2871,7 +2670,7 @@
         <p:spPr>
           <a:xfrm>
             <a:off x="685800" y="1143000"/>
-            <a:ext cx="5486040" cy="3085920"/>
+            <a:ext cx="5485680" cy="3085560"/>
           </a:xfrm>
           <a:prstGeom prst="rect">
             <a:avLst/>
@@ -2894,7 +2693,7 @@
         <p:spPr>
           <a:xfrm>
             <a:off x="685800" y="4400640"/>
-            <a:ext cx="5486040" cy="3600000"/>
+            <a:ext cx="5485680" cy="3599640"/>
           </a:xfrm>
           <a:prstGeom prst="rect">
             <a:avLst/>
@@ -2905,7 +2704,7 @@
           </a:ln>
         </p:spPr>
         <p:txBody>
-          <a:bodyPr anchor="t">
+          <a:bodyPr lIns="0" rIns="0" tIns="0" bIns="0" anchor="t">
             <a:noAutofit/>
           </a:bodyPr>
           <a:p>
@@ -2928,7 +2727,7 @@
         <p:spPr>
           <a:xfrm>
             <a:off x="3884760" y="8685360"/>
-            <a:ext cx="2971440" cy="458280"/>
+            <a:ext cx="2971080" cy="457920"/>
           </a:xfrm>
           <a:prstGeom prst="rect">
             <a:avLst/>
@@ -2939,7 +2738,7 @@
           </a:ln>
         </p:spPr>
         <p:txBody>
-          <a:bodyPr anchor="b">
+          <a:bodyPr lIns="0" rIns="0" tIns="0" bIns="0" anchor="b">
             <a:noAutofit/>
           </a:bodyPr>
           <a:lstStyle>
@@ -2964,7 +2763,7 @@
               </a:lnSpc>
               <a:buNone/>
             </a:pPr>
-            <a:fld id="{9F258D44-9E65-49A3-9E5F-8055DAAFEB1F}" type="slidenum">
+            <a:fld id="{6E624D67-3C5A-4EB2-BF07-37925C87D3A4}" type="slidenum">
               <a:rPr b="0" lang="en-US" sz="1200" spc="-1" strike="noStrike">
                 <a:solidFill>
                   <a:srgbClr val="000000"/>
@@ -3015,7 +2814,7 @@
         <p:spPr>
           <a:xfrm>
             <a:off x="685800" y="1143000"/>
-            <a:ext cx="5486040" cy="3085920"/>
+            <a:ext cx="5485680" cy="3085560"/>
           </a:xfrm>
           <a:prstGeom prst="rect">
             <a:avLst/>
@@ -3038,7 +2837,7 @@
         <p:spPr>
           <a:xfrm>
             <a:off x="685800" y="4400640"/>
-            <a:ext cx="5486040" cy="3600000"/>
+            <a:ext cx="5485680" cy="3599640"/>
           </a:xfrm>
           <a:prstGeom prst="rect">
             <a:avLst/>
@@ -3049,7 +2848,7 @@
           </a:ln>
         </p:spPr>
         <p:txBody>
-          <a:bodyPr anchor="t">
+          <a:bodyPr lIns="0" rIns="0" tIns="0" bIns="0" anchor="t">
             <a:noAutofit/>
           </a:bodyPr>
           <a:p>
@@ -3072,7 +2871,7 @@
         <p:spPr>
           <a:xfrm>
             <a:off x="3884760" y="8685360"/>
-            <a:ext cx="2971440" cy="458280"/>
+            <a:ext cx="2971080" cy="457920"/>
           </a:xfrm>
           <a:prstGeom prst="rect">
             <a:avLst/>
@@ -3083,7 +2882,7 @@
           </a:ln>
         </p:spPr>
         <p:txBody>
-          <a:bodyPr anchor="b">
+          <a:bodyPr lIns="0" rIns="0" tIns="0" bIns="0" anchor="b">
             <a:noAutofit/>
           </a:bodyPr>
           <a:lstStyle>
@@ -3108,7 +2907,7 @@
               </a:lnSpc>
               <a:buNone/>
             </a:pPr>
-            <a:fld id="{8881CE60-F208-483C-B05A-568082BD4B2B}" type="slidenum">
+            <a:fld id="{310B2B8A-68AE-4625-A9F1-FDD05873042E}" type="slidenum">
               <a:rPr b="0" lang="en-US" sz="1200" spc="-1" strike="noStrike">
                 <a:solidFill>
                   <a:srgbClr val="000000"/>
@@ -3159,7 +2958,7 @@
         <p:spPr>
           <a:xfrm>
             <a:off x="685800" y="1143000"/>
-            <a:ext cx="5486040" cy="3085920"/>
+            <a:ext cx="5485680" cy="3085560"/>
           </a:xfrm>
           <a:prstGeom prst="rect">
             <a:avLst/>
@@ -3182,7 +2981,7 @@
         <p:spPr>
           <a:xfrm>
             <a:off x="685800" y="4400640"/>
-            <a:ext cx="5486040" cy="3600000"/>
+            <a:ext cx="5485680" cy="3599640"/>
           </a:xfrm>
           <a:prstGeom prst="rect">
             <a:avLst/>
@@ -3193,7 +2992,7 @@
           </a:ln>
         </p:spPr>
         <p:txBody>
-          <a:bodyPr anchor="t">
+          <a:bodyPr lIns="0" rIns="0" tIns="0" bIns="0" anchor="t">
             <a:noAutofit/>
           </a:bodyPr>
           <a:p>
@@ -3216,7 +3015,7 @@
         <p:spPr>
           <a:xfrm>
             <a:off x="3884760" y="8685360"/>
-            <a:ext cx="2971440" cy="458280"/>
+            <a:ext cx="2971080" cy="457920"/>
           </a:xfrm>
           <a:prstGeom prst="rect">
             <a:avLst/>
@@ -3227,7 +3026,7 @@
           </a:ln>
         </p:spPr>
         <p:txBody>
-          <a:bodyPr anchor="b">
+          <a:bodyPr lIns="0" rIns="0" tIns="0" bIns="0" anchor="b">
             <a:noAutofit/>
           </a:bodyPr>
           <a:lstStyle>
@@ -3252,7 +3051,7 @@
               </a:lnSpc>
               <a:buNone/>
             </a:pPr>
-            <a:fld id="{61B03D07-6146-42F1-B05B-66382AD69401}" type="slidenum">
+            <a:fld id="{37CB7BA9-1071-4BF5-A11B-B00E94E5F319}" type="slidenum">
               <a:rPr b="0" lang="en-US" sz="1200" spc="-1" strike="noStrike">
                 <a:solidFill>
                   <a:srgbClr val="000000"/>
@@ -3303,7 +3102,7 @@
         <p:spPr>
           <a:xfrm>
             <a:off x="685800" y="1143000"/>
-            <a:ext cx="5486040" cy="3085920"/>
+            <a:ext cx="5485680" cy="3085560"/>
           </a:xfrm>
           <a:prstGeom prst="rect">
             <a:avLst/>
@@ -3326,7 +3125,7 @@
         <p:spPr>
           <a:xfrm>
             <a:off x="685800" y="4400640"/>
-            <a:ext cx="5486040" cy="3600000"/>
+            <a:ext cx="5485680" cy="3599640"/>
           </a:xfrm>
           <a:prstGeom prst="rect">
             <a:avLst/>
@@ -3337,7 +3136,7 @@
           </a:ln>
         </p:spPr>
         <p:txBody>
-          <a:bodyPr anchor="t">
+          <a:bodyPr lIns="0" rIns="0" tIns="0" bIns="0" anchor="t">
             <a:noAutofit/>
           </a:bodyPr>
           <a:p>
@@ -3360,7 +3159,7 @@
         <p:spPr>
           <a:xfrm>
             <a:off x="3884760" y="8685360"/>
-            <a:ext cx="2971440" cy="458280"/>
+            <a:ext cx="2971080" cy="457920"/>
           </a:xfrm>
           <a:prstGeom prst="rect">
             <a:avLst/>
@@ -3371,7 +3170,7 @@
           </a:ln>
         </p:spPr>
         <p:txBody>
-          <a:bodyPr anchor="b">
+          <a:bodyPr lIns="0" rIns="0" tIns="0" bIns="0" anchor="b">
             <a:noAutofit/>
           </a:bodyPr>
           <a:lstStyle>
@@ -3396,7 +3195,7 @@
               </a:lnSpc>
               <a:buNone/>
             </a:pPr>
-            <a:fld id="{594FEB91-2282-4F3C-9F0D-24DEB51E84D9}" type="slidenum">
+            <a:fld id="{470A4045-6D06-4B1B-A5C3-58174DF56ADC}" type="slidenum">
               <a:rPr b="0" lang="en-US" sz="1200" spc="-1" strike="noStrike">
                 <a:solidFill>
                   <a:srgbClr val="000000"/>
@@ -3447,7 +3246,7 @@
         <p:spPr>
           <a:xfrm>
             <a:off x="685800" y="1143000"/>
-            <a:ext cx="5486040" cy="3085920"/>
+            <a:ext cx="5485680" cy="3085560"/>
           </a:xfrm>
           <a:prstGeom prst="rect">
             <a:avLst/>
@@ -3470,7 +3269,7 @@
         <p:spPr>
           <a:xfrm>
             <a:off x="685800" y="4400640"/>
-            <a:ext cx="5486040" cy="3600000"/>
+            <a:ext cx="5485680" cy="3599640"/>
           </a:xfrm>
           <a:prstGeom prst="rect">
             <a:avLst/>
@@ -3481,7 +3280,7 @@
           </a:ln>
         </p:spPr>
         <p:txBody>
-          <a:bodyPr anchor="t">
+          <a:bodyPr lIns="0" rIns="0" tIns="0" bIns="0" anchor="t">
             <a:noAutofit/>
           </a:bodyPr>
           <a:p>
@@ -3504,7 +3303,7 @@
         <p:spPr>
           <a:xfrm>
             <a:off x="3884760" y="8685360"/>
-            <a:ext cx="2971440" cy="458280"/>
+            <a:ext cx="2971080" cy="457920"/>
           </a:xfrm>
           <a:prstGeom prst="rect">
             <a:avLst/>
@@ -3515,7 +3314,7 @@
           </a:ln>
         </p:spPr>
         <p:txBody>
-          <a:bodyPr anchor="b">
+          <a:bodyPr lIns="0" rIns="0" tIns="0" bIns="0" anchor="b">
             <a:noAutofit/>
           </a:bodyPr>
           <a:lstStyle>
@@ -3540,7 +3339,7 @@
               </a:lnSpc>
               <a:buNone/>
             </a:pPr>
-            <a:fld id="{42336FC1-ED2C-44B5-95FE-F67E28C8B2CC}" type="slidenum">
+            <a:fld id="{83993C77-56F1-480D-8A94-9D5D5B102795}" type="slidenum">
               <a:rPr b="0" lang="en-US" sz="1200" spc="-1" strike="noStrike">
                 <a:solidFill>
                   <a:srgbClr val="000000"/>
@@ -3591,7 +3390,7 @@
         <p:spPr>
           <a:xfrm>
             <a:off x="685800" y="1143000"/>
-            <a:ext cx="5486040" cy="3085920"/>
+            <a:ext cx="5485680" cy="3085560"/>
           </a:xfrm>
           <a:prstGeom prst="rect">
             <a:avLst/>
@@ -3614,7 +3413,7 @@
         <p:spPr>
           <a:xfrm>
             <a:off x="685800" y="4400640"/>
-            <a:ext cx="5486040" cy="3600000"/>
+            <a:ext cx="5485680" cy="3599640"/>
           </a:xfrm>
           <a:prstGeom prst="rect">
             <a:avLst/>
@@ -3625,7 +3424,7 @@
           </a:ln>
         </p:spPr>
         <p:txBody>
-          <a:bodyPr anchor="t">
+          <a:bodyPr lIns="0" rIns="0" tIns="0" bIns="0" anchor="t">
             <a:noAutofit/>
           </a:bodyPr>
           <a:p>
@@ -3648,7 +3447,7 @@
         <p:spPr>
           <a:xfrm>
             <a:off x="3884760" y="8685360"/>
-            <a:ext cx="2971440" cy="458280"/>
+            <a:ext cx="2971080" cy="457920"/>
           </a:xfrm>
           <a:prstGeom prst="rect">
             <a:avLst/>
@@ -3659,7 +3458,7 @@
           </a:ln>
         </p:spPr>
         <p:txBody>
-          <a:bodyPr anchor="b">
+          <a:bodyPr lIns="0" rIns="0" tIns="0" bIns="0" anchor="b">
             <a:noAutofit/>
           </a:bodyPr>
           <a:lstStyle>
@@ -3684,7 +3483,7 @@
               </a:lnSpc>
               <a:buNone/>
             </a:pPr>
-            <a:fld id="{B09BF38D-A79D-410F-B458-5EC06AE736CD}" type="slidenum">
+            <a:fld id="{9C286634-8236-4C1B-BF0B-EF560653A5B2}" type="slidenum">
               <a:rPr b="0" lang="en-US" sz="1200" spc="-1" strike="noStrike">
                 <a:solidFill>
                   <a:srgbClr val="000000"/>
@@ -3735,7 +3534,7 @@
         <p:spPr>
           <a:xfrm>
             <a:off x="685800" y="1143000"/>
-            <a:ext cx="5486040" cy="3085920"/>
+            <a:ext cx="5485680" cy="3085560"/>
           </a:xfrm>
           <a:prstGeom prst="rect">
             <a:avLst/>
@@ -3758,7 +3557,7 @@
         <p:spPr>
           <a:xfrm>
             <a:off x="685800" y="4400640"/>
-            <a:ext cx="5486040" cy="3600000"/>
+            <a:ext cx="5485680" cy="3599640"/>
           </a:xfrm>
           <a:prstGeom prst="rect">
             <a:avLst/>
@@ -3769,7 +3568,7 @@
           </a:ln>
         </p:spPr>
         <p:txBody>
-          <a:bodyPr anchor="t">
+          <a:bodyPr lIns="0" rIns="0" tIns="0" bIns="0" anchor="t">
             <a:noAutofit/>
           </a:bodyPr>
           <a:p>
@@ -3792,7 +3591,7 @@
         <p:spPr>
           <a:xfrm>
             <a:off x="3884760" y="8685360"/>
-            <a:ext cx="2971440" cy="458280"/>
+            <a:ext cx="2971080" cy="457920"/>
           </a:xfrm>
           <a:prstGeom prst="rect">
             <a:avLst/>
@@ -3803,7 +3602,7 @@
           </a:ln>
         </p:spPr>
         <p:txBody>
-          <a:bodyPr anchor="b">
+          <a:bodyPr lIns="0" rIns="0" tIns="0" bIns="0" anchor="b">
             <a:noAutofit/>
           </a:bodyPr>
           <a:lstStyle>
@@ -3828,7 +3627,7 @@
               </a:lnSpc>
               <a:buNone/>
             </a:pPr>
-            <a:fld id="{C054BDD0-974A-4C4B-9776-D26782BAF5F1}" type="slidenum">
+            <a:fld id="{E5208826-B37E-4CA1-945B-C3C1472B923C}" type="slidenum">
               <a:rPr b="0" lang="en-US" sz="1200" spc="-1" strike="noStrike">
                 <a:solidFill>
                   <a:srgbClr val="000000"/>
@@ -3879,7 +3678,7 @@
         <p:spPr>
           <a:xfrm>
             <a:off x="685800" y="1143000"/>
-            <a:ext cx="5486040" cy="3085920"/>
+            <a:ext cx="5485680" cy="3085560"/>
           </a:xfrm>
           <a:prstGeom prst="rect">
             <a:avLst/>
@@ -3902,7 +3701,7 @@
         <p:spPr>
           <a:xfrm>
             <a:off x="685800" y="4400640"/>
-            <a:ext cx="5486040" cy="3600000"/>
+            <a:ext cx="5485680" cy="3599640"/>
           </a:xfrm>
           <a:prstGeom prst="rect">
             <a:avLst/>
@@ -3913,7 +3712,7 @@
           </a:ln>
         </p:spPr>
         <p:txBody>
-          <a:bodyPr anchor="t">
+          <a:bodyPr lIns="0" rIns="0" tIns="0" bIns="0" anchor="t">
             <a:noAutofit/>
           </a:bodyPr>
           <a:p>
@@ -3936,7 +3735,7 @@
         <p:spPr>
           <a:xfrm>
             <a:off x="3884760" y="8685360"/>
-            <a:ext cx="2971440" cy="458280"/>
+            <a:ext cx="2971080" cy="457920"/>
           </a:xfrm>
           <a:prstGeom prst="rect">
             <a:avLst/>
@@ -3947,7 +3746,7 @@
           </a:ln>
         </p:spPr>
         <p:txBody>
-          <a:bodyPr anchor="b">
+          <a:bodyPr lIns="0" rIns="0" tIns="0" bIns="0" anchor="b">
             <a:noAutofit/>
           </a:bodyPr>
           <a:lstStyle>
@@ -3972,7 +3771,7 @@
               </a:lnSpc>
               <a:buNone/>
             </a:pPr>
-            <a:fld id="{839B7634-1F20-4146-843B-BC369333E38A}" type="slidenum">
+            <a:fld id="{5E0A6388-6DFF-4EDA-B7D8-146A6C9DA754}" type="slidenum">
               <a:rPr b="0" lang="en-US" sz="1200" spc="-1" strike="noStrike">
                 <a:solidFill>
                   <a:srgbClr val="000000"/>
@@ -4023,7 +3822,7 @@
         <p:spPr>
           <a:xfrm>
             <a:off x="685800" y="1143000"/>
-            <a:ext cx="5486040" cy="3085920"/>
+            <a:ext cx="5485680" cy="3085560"/>
           </a:xfrm>
           <a:prstGeom prst="rect">
             <a:avLst/>
@@ -4046,7 +3845,7 @@
         <p:spPr>
           <a:xfrm>
             <a:off x="685800" y="4400640"/>
-            <a:ext cx="5486040" cy="3600000"/>
+            <a:ext cx="5485680" cy="3599640"/>
           </a:xfrm>
           <a:prstGeom prst="rect">
             <a:avLst/>
@@ -4057,7 +3856,7 @@
           </a:ln>
         </p:spPr>
         <p:txBody>
-          <a:bodyPr anchor="t">
+          <a:bodyPr lIns="0" rIns="0" tIns="0" bIns="0" anchor="t">
             <a:noAutofit/>
           </a:bodyPr>
           <a:p>
@@ -4080,7 +3879,7 @@
         <p:spPr>
           <a:xfrm>
             <a:off x="3884760" y="8685360"/>
-            <a:ext cx="2971440" cy="458280"/>
+            <a:ext cx="2971080" cy="457920"/>
           </a:xfrm>
           <a:prstGeom prst="rect">
             <a:avLst/>
@@ -4091,7 +3890,7 @@
           </a:ln>
         </p:spPr>
         <p:txBody>
-          <a:bodyPr anchor="b">
+          <a:bodyPr lIns="0" rIns="0" tIns="0" bIns="0" anchor="b">
             <a:noAutofit/>
           </a:bodyPr>
           <a:lstStyle>
@@ -4116,7 +3915,7 @@
               </a:lnSpc>
               <a:buNone/>
             </a:pPr>
-            <a:fld id="{06D605E8-7995-45DA-A847-A946F866594F}" type="slidenum">
+            <a:fld id="{1B573E77-3834-483B-ADAD-CFE96699CA37}" type="slidenum">
               <a:rPr b="0" lang="en-US" sz="1200" spc="-1" strike="noStrike">
                 <a:solidFill>
                   <a:srgbClr val="000000"/>
@@ -4167,7 +3966,7 @@
         <p:spPr>
           <a:xfrm>
             <a:off x="685800" y="1143000"/>
-            <a:ext cx="5486040" cy="3085920"/>
+            <a:ext cx="5485680" cy="3085560"/>
           </a:xfrm>
           <a:prstGeom prst="rect">
             <a:avLst/>
@@ -4190,7 +3989,7 @@
         <p:spPr>
           <a:xfrm>
             <a:off x="685800" y="4400640"/>
-            <a:ext cx="5486040" cy="3600000"/>
+            <a:ext cx="5485680" cy="3599640"/>
           </a:xfrm>
           <a:prstGeom prst="rect">
             <a:avLst/>
@@ -4201,7 +4000,7 @@
           </a:ln>
         </p:spPr>
         <p:txBody>
-          <a:bodyPr anchor="t">
+          <a:bodyPr lIns="0" rIns="0" tIns="0" bIns="0" anchor="t">
             <a:noAutofit/>
           </a:bodyPr>
           <a:p>
@@ -4224,7 +4023,7 @@
         <p:spPr>
           <a:xfrm>
             <a:off x="3884760" y="8685360"/>
-            <a:ext cx="2971440" cy="458280"/>
+            <a:ext cx="2971080" cy="457920"/>
           </a:xfrm>
           <a:prstGeom prst="rect">
             <a:avLst/>
@@ -4235,7 +4034,7 @@
           </a:ln>
         </p:spPr>
         <p:txBody>
-          <a:bodyPr anchor="b">
+          <a:bodyPr lIns="0" rIns="0" tIns="0" bIns="0" anchor="b">
             <a:noAutofit/>
           </a:bodyPr>
           <a:lstStyle>
@@ -4260,7 +4059,7 @@
               </a:lnSpc>
               <a:buNone/>
             </a:pPr>
-            <a:fld id="{8F2A18FA-D9CA-413B-8BF0-26E7309B8B24}" type="slidenum">
+            <a:fld id="{697D9407-AEBB-4884-8B79-891F115D924B}" type="slidenum">
               <a:rPr b="0" lang="en-US" sz="1200" spc="-1" strike="noStrike">
                 <a:solidFill>
                   <a:srgbClr val="000000"/>
@@ -4311,7 +4110,7 @@
         <p:spPr>
           <a:xfrm>
             <a:off x="685800" y="1143000"/>
-            <a:ext cx="5486040" cy="3085920"/>
+            <a:ext cx="5485680" cy="3085560"/>
           </a:xfrm>
           <a:prstGeom prst="rect">
             <a:avLst/>
@@ -4334,7 +4133,7 @@
         <p:spPr>
           <a:xfrm>
             <a:off x="685800" y="4400640"/>
-            <a:ext cx="5486040" cy="3600000"/>
+            <a:ext cx="5485680" cy="3599640"/>
           </a:xfrm>
           <a:prstGeom prst="rect">
             <a:avLst/>
@@ -4345,7 +4144,7 @@
           </a:ln>
         </p:spPr>
         <p:txBody>
-          <a:bodyPr anchor="t">
+          <a:bodyPr lIns="0" rIns="0" tIns="0" bIns="0" anchor="t">
             <a:noAutofit/>
           </a:bodyPr>
           <a:p>
@@ -4368,7 +4167,7 @@
         <p:spPr>
           <a:xfrm>
             <a:off x="3884760" y="8685360"/>
-            <a:ext cx="2971440" cy="458280"/>
+            <a:ext cx="2971080" cy="457920"/>
           </a:xfrm>
           <a:prstGeom prst="rect">
             <a:avLst/>
@@ -4379,7 +4178,7 @@
           </a:ln>
         </p:spPr>
         <p:txBody>
-          <a:bodyPr anchor="b">
+          <a:bodyPr lIns="0" rIns="0" tIns="0" bIns="0" anchor="b">
             <a:noAutofit/>
           </a:bodyPr>
           <a:lstStyle>
@@ -4404,7 +4203,7 @@
               </a:lnSpc>
               <a:buNone/>
             </a:pPr>
-            <a:fld id="{35BDEB04-1EA3-4FC4-BB7F-129D7C162AF5}" type="slidenum">
+            <a:fld id="{B5078375-6CBD-4E64-A430-2D2806758F85}" type="slidenum">
               <a:rPr b="0" lang="en-US" sz="1200" spc="-1" strike="noStrike">
                 <a:solidFill>
                   <a:srgbClr val="000000"/>
@@ -4492,11 +4291,11 @@
             <a:noAutofit/>
           </a:bodyPr>
           <a:p>
-            <a:endParaRPr b="0" lang="en-IN" sz="1800" spc="-1" strike="noStrike">
-              <a:solidFill>
-                <a:srgbClr val="000000"/>
-              </a:solidFill>
-              <a:latin typeface="Calibri"/>
+            <a:pPr algn="ctr">
+              <a:buNone/>
+            </a:pPr>
+            <a:endParaRPr b="0" lang="en-IN" sz="4400" spc="-1" strike="noStrike">
+              <a:latin typeface="Arial"/>
             </a:endParaRPr>
           </a:p>
         </p:txBody>
@@ -4530,10 +4329,7 @@
           </a:bodyPr>
           <a:p>
             <a:endParaRPr b="0" lang="en-IN" sz="3200" spc="-1" strike="noStrike">
-              <a:solidFill>
-                <a:srgbClr val="000000"/>
-              </a:solidFill>
-              <a:latin typeface="Calibri"/>
+              <a:latin typeface="Arial"/>
             </a:endParaRPr>
           </a:p>
         </p:txBody>
@@ -4567,10 +4363,7 @@
           </a:bodyPr>
           <a:p>
             <a:endParaRPr b="0" lang="en-IN" sz="3200" spc="-1" strike="noStrike">
-              <a:solidFill>
-                <a:srgbClr val="000000"/>
-              </a:solidFill>
-              <a:latin typeface="Calibri"/>
+              <a:latin typeface="Arial"/>
             </a:endParaRPr>
           </a:p>
         </p:txBody>
@@ -4625,11 +4418,11 @@
             <a:noAutofit/>
           </a:bodyPr>
           <a:p>
-            <a:endParaRPr b="0" lang="en-IN" sz="1800" spc="-1" strike="noStrike">
-              <a:solidFill>
-                <a:srgbClr val="000000"/>
-              </a:solidFill>
-              <a:latin typeface="Calibri"/>
+            <a:pPr algn="ctr">
+              <a:buNone/>
+            </a:pPr>
+            <a:endParaRPr b="0" lang="en-IN" sz="4400" spc="-1" strike="noStrike">
+              <a:latin typeface="Arial"/>
             </a:endParaRPr>
           </a:p>
         </p:txBody>
@@ -4663,10 +4456,7 @@
           </a:bodyPr>
           <a:p>
             <a:endParaRPr b="0" lang="en-IN" sz="3200" spc="-1" strike="noStrike">
-              <a:solidFill>
-                <a:srgbClr val="000000"/>
-              </a:solidFill>
-              <a:latin typeface="Calibri"/>
+              <a:latin typeface="Arial"/>
             </a:endParaRPr>
           </a:p>
         </p:txBody>
@@ -4700,10 +4490,7 @@
           </a:bodyPr>
           <a:p>
             <a:endParaRPr b="0" lang="en-IN" sz="3200" spc="-1" strike="noStrike">
-              <a:solidFill>
-                <a:srgbClr val="000000"/>
-              </a:solidFill>
-              <a:latin typeface="Calibri"/>
+              <a:latin typeface="Arial"/>
             </a:endParaRPr>
           </a:p>
         </p:txBody>
@@ -4737,10 +4524,7 @@
           </a:bodyPr>
           <a:p>
             <a:endParaRPr b="0" lang="en-IN" sz="3200" spc="-1" strike="noStrike">
-              <a:solidFill>
-                <a:srgbClr val="000000"/>
-              </a:solidFill>
-              <a:latin typeface="Calibri"/>
+              <a:latin typeface="Arial"/>
             </a:endParaRPr>
           </a:p>
         </p:txBody>
@@ -4774,10 +4558,7 @@
           </a:bodyPr>
           <a:p>
             <a:endParaRPr b="0" lang="en-IN" sz="3200" spc="-1" strike="noStrike">
-              <a:solidFill>
-                <a:srgbClr val="000000"/>
-              </a:solidFill>
-              <a:latin typeface="Calibri"/>
+              <a:latin typeface="Arial"/>
             </a:endParaRPr>
           </a:p>
         </p:txBody>
@@ -4832,11 +4613,11 @@
             <a:noAutofit/>
           </a:bodyPr>
           <a:p>
-            <a:endParaRPr b="0" lang="en-IN" sz="1800" spc="-1" strike="noStrike">
-              <a:solidFill>
-                <a:srgbClr val="000000"/>
-              </a:solidFill>
-              <a:latin typeface="Calibri"/>
+            <a:pPr algn="ctr">
+              <a:buNone/>
+            </a:pPr>
+            <a:endParaRPr b="0" lang="en-IN" sz="4400" spc="-1" strike="noStrike">
+              <a:latin typeface="Arial"/>
             </a:endParaRPr>
           </a:p>
         </p:txBody>
@@ -4870,10 +4651,7 @@
           </a:bodyPr>
           <a:p>
             <a:endParaRPr b="0" lang="en-IN" sz="3200" spc="-1" strike="noStrike">
-              <a:solidFill>
-                <a:srgbClr val="000000"/>
-              </a:solidFill>
-              <a:latin typeface="Calibri"/>
+              <a:latin typeface="Arial"/>
             </a:endParaRPr>
           </a:p>
         </p:txBody>
@@ -4907,10 +4685,7 @@
           </a:bodyPr>
           <a:p>
             <a:endParaRPr b="0" lang="en-IN" sz="3200" spc="-1" strike="noStrike">
-              <a:solidFill>
-                <a:srgbClr val="000000"/>
-              </a:solidFill>
-              <a:latin typeface="Calibri"/>
+              <a:latin typeface="Arial"/>
             </a:endParaRPr>
           </a:p>
         </p:txBody>
@@ -4944,10 +4719,7 @@
           </a:bodyPr>
           <a:p>
             <a:endParaRPr b="0" lang="en-IN" sz="3200" spc="-1" strike="noStrike">
-              <a:solidFill>
-                <a:srgbClr val="000000"/>
-              </a:solidFill>
-              <a:latin typeface="Calibri"/>
+              <a:latin typeface="Arial"/>
             </a:endParaRPr>
           </a:p>
         </p:txBody>
@@ -4981,10 +4753,7 @@
           </a:bodyPr>
           <a:p>
             <a:endParaRPr b="0" lang="en-IN" sz="3200" spc="-1" strike="noStrike">
-              <a:solidFill>
-                <a:srgbClr val="000000"/>
-              </a:solidFill>
-              <a:latin typeface="Calibri"/>
+              <a:latin typeface="Arial"/>
             </a:endParaRPr>
           </a:p>
         </p:txBody>
@@ -5018,10 +4787,7 @@
           </a:bodyPr>
           <a:p>
             <a:endParaRPr b="0" lang="en-IN" sz="3200" spc="-1" strike="noStrike">
-              <a:solidFill>
-                <a:srgbClr val="000000"/>
-              </a:solidFill>
-              <a:latin typeface="Calibri"/>
+              <a:latin typeface="Arial"/>
             </a:endParaRPr>
           </a:p>
         </p:txBody>
@@ -5055,10 +4821,7 @@
           </a:bodyPr>
           <a:p>
             <a:endParaRPr b="0" lang="en-IN" sz="3200" spc="-1" strike="noStrike">
-              <a:solidFill>
-                <a:srgbClr val="000000"/>
-              </a:solidFill>
-              <a:latin typeface="Calibri"/>
+              <a:latin typeface="Arial"/>
             </a:endParaRPr>
           </a:p>
         </p:txBody>
@@ -5113,11 +4876,11 @@
             <a:noAutofit/>
           </a:bodyPr>
           <a:p>
-            <a:endParaRPr b="0" lang="en-IN" sz="1800" spc="-1" strike="noStrike">
-              <a:solidFill>
-                <a:srgbClr val="000000"/>
-              </a:solidFill>
-              <a:latin typeface="Calibri"/>
+            <a:pPr algn="ctr">
+              <a:buNone/>
+            </a:pPr>
+            <a:endParaRPr b="0" lang="en-IN" sz="4400" spc="-1" strike="noStrike">
+              <a:latin typeface="Arial"/>
             </a:endParaRPr>
           </a:p>
         </p:txBody>
@@ -5209,11 +4972,11 @@
             <a:noAutofit/>
           </a:bodyPr>
           <a:p>
-            <a:endParaRPr b="0" lang="en-IN" sz="1800" spc="-1" strike="noStrike">
-              <a:solidFill>
-                <a:srgbClr val="000000"/>
-              </a:solidFill>
-              <a:latin typeface="Calibri"/>
+            <a:pPr algn="ctr">
+              <a:buNone/>
+            </a:pPr>
+            <a:endParaRPr b="0" lang="en-IN" sz="4400" spc="-1" strike="noStrike">
+              <a:latin typeface="Arial"/>
             </a:endParaRPr>
           </a:p>
         </p:txBody>
@@ -5247,10 +5010,7 @@
           </a:bodyPr>
           <a:p>
             <a:endParaRPr b="0" lang="en-IN" sz="3200" spc="-1" strike="noStrike">
-              <a:solidFill>
-                <a:srgbClr val="000000"/>
-              </a:solidFill>
-              <a:latin typeface="Calibri"/>
+              <a:latin typeface="Arial"/>
             </a:endParaRPr>
           </a:p>
         </p:txBody>
@@ -5305,11 +5065,11 @@
             <a:noAutofit/>
           </a:bodyPr>
           <a:p>
-            <a:endParaRPr b="0" lang="en-IN" sz="1800" spc="-1" strike="noStrike">
-              <a:solidFill>
-                <a:srgbClr val="000000"/>
-              </a:solidFill>
-              <a:latin typeface="Calibri"/>
+            <a:pPr algn="ctr">
+              <a:buNone/>
+            </a:pPr>
+            <a:endParaRPr b="0" lang="en-IN" sz="4400" spc="-1" strike="noStrike">
+              <a:latin typeface="Arial"/>
             </a:endParaRPr>
           </a:p>
         </p:txBody>
@@ -5343,10 +5103,7 @@
           </a:bodyPr>
           <a:p>
             <a:endParaRPr b="0" lang="en-IN" sz="3200" spc="-1" strike="noStrike">
-              <a:solidFill>
-                <a:srgbClr val="000000"/>
-              </a:solidFill>
-              <a:latin typeface="Calibri"/>
+              <a:latin typeface="Arial"/>
             </a:endParaRPr>
           </a:p>
         </p:txBody>
@@ -5380,10 +5137,7 @@
           </a:bodyPr>
           <a:p>
             <a:endParaRPr b="0" lang="en-IN" sz="3200" spc="-1" strike="noStrike">
-              <a:solidFill>
-                <a:srgbClr val="000000"/>
-              </a:solidFill>
-              <a:latin typeface="Calibri"/>
+              <a:latin typeface="Arial"/>
             </a:endParaRPr>
           </a:p>
         </p:txBody>
@@ -5438,11 +5192,11 @@
             <a:noAutofit/>
           </a:bodyPr>
           <a:p>
-            <a:endParaRPr b="0" lang="en-IN" sz="1800" spc="-1" strike="noStrike">
-              <a:solidFill>
-                <a:srgbClr val="000000"/>
-              </a:solidFill>
-              <a:latin typeface="Calibri"/>
+            <a:pPr algn="ctr">
+              <a:buNone/>
+            </a:pPr>
+            <a:endParaRPr b="0" lang="en-IN" sz="4400" spc="-1" strike="noStrike">
+              <a:latin typeface="Arial"/>
             </a:endParaRPr>
           </a:p>
         </p:txBody>
@@ -5556,11 +5310,11 @@
             <a:noAutofit/>
           </a:bodyPr>
           <a:p>
-            <a:endParaRPr b="0" lang="en-IN" sz="1800" spc="-1" strike="noStrike">
-              <a:solidFill>
-                <a:srgbClr val="000000"/>
-              </a:solidFill>
-              <a:latin typeface="Calibri"/>
+            <a:pPr algn="ctr">
+              <a:buNone/>
+            </a:pPr>
+            <a:endParaRPr b="0" lang="en-IN" sz="4400" spc="-1" strike="noStrike">
+              <a:latin typeface="Arial"/>
             </a:endParaRPr>
           </a:p>
         </p:txBody>
@@ -5594,10 +5348,7 @@
           </a:bodyPr>
           <a:p>
             <a:endParaRPr b="0" lang="en-IN" sz="3200" spc="-1" strike="noStrike">
-              <a:solidFill>
-                <a:srgbClr val="000000"/>
-              </a:solidFill>
-              <a:latin typeface="Calibri"/>
+              <a:latin typeface="Arial"/>
             </a:endParaRPr>
           </a:p>
         </p:txBody>
@@ -5631,10 +5382,7 @@
           </a:bodyPr>
           <a:p>
             <a:endParaRPr b="0" lang="en-IN" sz="3200" spc="-1" strike="noStrike">
-              <a:solidFill>
-                <a:srgbClr val="000000"/>
-              </a:solidFill>
-              <a:latin typeface="Calibri"/>
+              <a:latin typeface="Arial"/>
             </a:endParaRPr>
           </a:p>
         </p:txBody>
@@ -5668,10 +5416,7 @@
           </a:bodyPr>
           <a:p>
             <a:endParaRPr b="0" lang="en-IN" sz="3200" spc="-1" strike="noStrike">
-              <a:solidFill>
-                <a:srgbClr val="000000"/>
-              </a:solidFill>
-              <a:latin typeface="Calibri"/>
+              <a:latin typeface="Arial"/>
             </a:endParaRPr>
           </a:p>
         </p:txBody>
@@ -5726,11 +5471,11 @@
             <a:noAutofit/>
           </a:bodyPr>
           <a:p>
-            <a:endParaRPr b="0" lang="en-IN" sz="1800" spc="-1" strike="noStrike">
-              <a:solidFill>
-                <a:srgbClr val="000000"/>
-              </a:solidFill>
-              <a:latin typeface="Calibri"/>
+            <a:pPr algn="ctr">
+              <a:buNone/>
+            </a:pPr>
+            <a:endParaRPr b="0" lang="en-IN" sz="4400" spc="-1" strike="noStrike">
+              <a:latin typeface="Arial"/>
             </a:endParaRPr>
           </a:p>
         </p:txBody>
@@ -5764,10 +5509,7 @@
           </a:bodyPr>
           <a:p>
             <a:endParaRPr b="0" lang="en-IN" sz="3200" spc="-1" strike="noStrike">
-              <a:solidFill>
-                <a:srgbClr val="000000"/>
-              </a:solidFill>
-              <a:latin typeface="Calibri"/>
+              <a:latin typeface="Arial"/>
             </a:endParaRPr>
           </a:p>
         </p:txBody>
@@ -5801,10 +5543,7 @@
           </a:bodyPr>
           <a:p>
             <a:endParaRPr b="0" lang="en-IN" sz="3200" spc="-1" strike="noStrike">
-              <a:solidFill>
-                <a:srgbClr val="000000"/>
-              </a:solidFill>
-              <a:latin typeface="Calibri"/>
+              <a:latin typeface="Arial"/>
             </a:endParaRPr>
           </a:p>
         </p:txBody>
@@ -5838,10 +5577,7 @@
           </a:bodyPr>
           <a:p>
             <a:endParaRPr b="0" lang="en-IN" sz="3200" spc="-1" strike="noStrike">
-              <a:solidFill>
-                <a:srgbClr val="000000"/>
-              </a:solidFill>
-              <a:latin typeface="Calibri"/>
+              <a:latin typeface="Arial"/>
             </a:endParaRPr>
           </a:p>
         </p:txBody>
@@ -5896,11 +5632,11 @@
             <a:noAutofit/>
           </a:bodyPr>
           <a:p>
-            <a:endParaRPr b="0" lang="en-IN" sz="1800" spc="-1" strike="noStrike">
-              <a:solidFill>
-                <a:srgbClr val="000000"/>
-              </a:solidFill>
-              <a:latin typeface="Calibri"/>
+            <a:pPr algn="ctr">
+              <a:buNone/>
+            </a:pPr>
+            <a:endParaRPr b="0" lang="en-IN" sz="4400" spc="-1" strike="noStrike">
+              <a:latin typeface="Arial"/>
             </a:endParaRPr>
           </a:p>
         </p:txBody>
@@ -5934,10 +5670,7 @@
           </a:bodyPr>
           <a:p>
             <a:endParaRPr b="0" lang="en-IN" sz="3200" spc="-1" strike="noStrike">
-              <a:solidFill>
-                <a:srgbClr val="000000"/>
-              </a:solidFill>
-              <a:latin typeface="Calibri"/>
+              <a:latin typeface="Arial"/>
             </a:endParaRPr>
           </a:p>
         </p:txBody>
@@ -5971,10 +5704,7 @@
           </a:bodyPr>
           <a:p>
             <a:endParaRPr b="0" lang="en-IN" sz="3200" spc="-1" strike="noStrike">
-              <a:solidFill>
-                <a:srgbClr val="000000"/>
-              </a:solidFill>
-              <a:latin typeface="Calibri"/>
+              <a:latin typeface="Arial"/>
             </a:endParaRPr>
           </a:p>
         </p:txBody>
@@ -6008,10 +5738,7 @@
           </a:bodyPr>
           <a:p>
             <a:endParaRPr b="0" lang="en-IN" sz="3200" spc="-1" strike="noStrike">
-              <a:solidFill>
-                <a:srgbClr val="000000"/>
-              </a:solidFill>
-              <a:latin typeface="Calibri"/>
+              <a:latin typeface="Arial"/>
             </a:endParaRPr>
           </a:p>
         </p:txBody>
@@ -6073,20 +5800,17 @@
             <a:noAutofit/>
           </a:bodyPr>
           <a:p>
-            <a:r>
-              <a:rPr b="0" lang="en-IN" sz="1800" spc="-1" strike="noStrike">
-                <a:solidFill>
-                  <a:srgbClr val="000000"/>
-                </a:solidFill>
-                <a:latin typeface="Calibri"/>
+            <a:pPr algn="ctr">
+              <a:buNone/>
+            </a:pPr>
+            <a:r>
+              <a:rPr b="0" lang="en-IN" sz="4400" spc="-1" strike="noStrike">
+                <a:latin typeface="Arial"/>
               </a:rPr>
               <a:t>Click to edit the title text format</a:t>
             </a:r>
-            <a:endParaRPr b="0" lang="en-IN" sz="1800" spc="-1" strike="noStrike">
-              <a:solidFill>
-                <a:srgbClr val="000000"/>
-              </a:solidFill>
-              <a:latin typeface="Calibri"/>
+            <a:endParaRPr b="0" lang="en-IN" sz="4400" spc="-1" strike="noStrike">
+              <a:latin typeface="Arial"/>
             </a:endParaRPr>
           </a:p>
         </p:txBody>
@@ -6132,18 +5856,12 @@
             </a:pPr>
             <a:r>
               <a:rPr b="0" lang="en-IN" sz="3200" spc="-1" strike="noStrike">
-                <a:solidFill>
-                  <a:srgbClr val="000000"/>
-                </a:solidFill>
-                <a:latin typeface="Calibri"/>
+                <a:latin typeface="Arial"/>
               </a:rPr>
               <a:t>Click to edit the outline text format</a:t>
             </a:r>
             <a:endParaRPr b="0" lang="en-IN" sz="3200" spc="-1" strike="noStrike">
-              <a:solidFill>
-                <a:srgbClr val="000000"/>
-              </a:solidFill>
-              <a:latin typeface="Calibri"/>
+              <a:latin typeface="Arial"/>
             </a:endParaRPr>
           </a:p>
           <a:p>
@@ -6159,19 +5877,13 @@
               <a:buChar char=""/>
             </a:pPr>
             <a:r>
-              <a:rPr b="0" lang="en-IN" sz="2400" spc="-1" strike="noStrike">
-                <a:solidFill>
-                  <a:srgbClr val="000000"/>
-                </a:solidFill>
-                <a:latin typeface="Calibri"/>
+              <a:rPr b="0" lang="en-IN" sz="2800" spc="-1" strike="noStrike">
+                <a:latin typeface="Arial"/>
               </a:rPr>
               <a:t>Second Outline Level</a:t>
             </a:r>
-            <a:endParaRPr b="0" lang="en-IN" sz="2400" spc="-1" strike="noStrike">
-              <a:solidFill>
-                <a:srgbClr val="000000"/>
-              </a:solidFill>
-              <a:latin typeface="Calibri"/>
+            <a:endParaRPr b="0" lang="en-IN" sz="2800" spc="-1" strike="noStrike">
+              <a:latin typeface="Arial"/>
             </a:endParaRPr>
           </a:p>
           <a:p>
@@ -6187,19 +5899,13 @@
               <a:buChar char=""/>
             </a:pPr>
             <a:r>
-              <a:rPr b="0" lang="en-IN" sz="2000" spc="-1" strike="noStrike">
-                <a:solidFill>
-                  <a:srgbClr val="000000"/>
-                </a:solidFill>
-                <a:latin typeface="Calibri"/>
+              <a:rPr b="0" lang="en-IN" sz="2400" spc="-1" strike="noStrike">
+                <a:latin typeface="Arial"/>
               </a:rPr>
               <a:t>Third Outline Level</a:t>
             </a:r>
-            <a:endParaRPr b="0" lang="en-IN" sz="2000" spc="-1" strike="noStrike">
-              <a:solidFill>
-                <a:srgbClr val="000000"/>
-              </a:solidFill>
-              <a:latin typeface="Calibri"/>
+            <a:endParaRPr b="0" lang="en-IN" sz="2400" spc="-1" strike="noStrike">
+              <a:latin typeface="Arial"/>
             </a:endParaRPr>
           </a:p>
           <a:p>
@@ -6216,18 +5922,12 @@
             </a:pPr>
             <a:r>
               <a:rPr b="0" lang="en-IN" sz="2000" spc="-1" strike="noStrike">
-                <a:solidFill>
-                  <a:srgbClr val="000000"/>
-                </a:solidFill>
-                <a:latin typeface="Calibri"/>
+                <a:latin typeface="Arial"/>
               </a:rPr>
               <a:t>Fourth Outline Level</a:t>
             </a:r>
             <a:endParaRPr b="0" lang="en-IN" sz="2000" spc="-1" strike="noStrike">
-              <a:solidFill>
-                <a:srgbClr val="000000"/>
-              </a:solidFill>
-              <a:latin typeface="Calibri"/>
+              <a:latin typeface="Arial"/>
             </a:endParaRPr>
           </a:p>
           <a:p>
@@ -6244,18 +5944,12 @@
             </a:pPr>
             <a:r>
               <a:rPr b="0" lang="en-IN" sz="2000" spc="-1" strike="noStrike">
-                <a:solidFill>
-                  <a:srgbClr val="000000"/>
-                </a:solidFill>
-                <a:latin typeface="Calibri"/>
+                <a:latin typeface="Arial"/>
               </a:rPr>
               <a:t>Fifth Outline Level</a:t>
             </a:r>
             <a:endParaRPr b="0" lang="en-IN" sz="2000" spc="-1" strike="noStrike">
-              <a:solidFill>
-                <a:srgbClr val="000000"/>
-              </a:solidFill>
-              <a:latin typeface="Calibri"/>
+              <a:latin typeface="Arial"/>
             </a:endParaRPr>
           </a:p>
           <a:p>
@@ -6272,18 +5966,12 @@
             </a:pPr>
             <a:r>
               <a:rPr b="0" lang="en-IN" sz="2000" spc="-1" strike="noStrike">
-                <a:solidFill>
-                  <a:srgbClr val="000000"/>
-                </a:solidFill>
-                <a:latin typeface="Calibri"/>
+                <a:latin typeface="Arial"/>
               </a:rPr>
               <a:t>Sixth Outline Level</a:t>
             </a:r>
             <a:endParaRPr b="0" lang="en-IN" sz="2000" spc="-1" strike="noStrike">
-              <a:solidFill>
-                <a:srgbClr val="000000"/>
-              </a:solidFill>
-              <a:latin typeface="Calibri"/>
+              <a:latin typeface="Arial"/>
             </a:endParaRPr>
           </a:p>
           <a:p>
@@ -6300,18 +5988,12 @@
             </a:pPr>
             <a:r>
               <a:rPr b="0" lang="en-IN" sz="2000" spc="-1" strike="noStrike">
-                <a:solidFill>
-                  <a:srgbClr val="000000"/>
-                </a:solidFill>
-                <a:latin typeface="Calibri"/>
+                <a:latin typeface="Arial"/>
               </a:rPr>
               <a:t>Seventh Outline Level</a:t>
             </a:r>
             <a:endParaRPr b="0" lang="en-IN" sz="2000" spc="-1" strike="noStrike">
-              <a:solidFill>
-                <a:srgbClr val="000000"/>
-              </a:solidFill>
-              <a:latin typeface="Calibri"/>
+              <a:latin typeface="Arial"/>
             </a:endParaRPr>
           </a:p>
         </p:txBody>
@@ -6369,7 +6051,7 @@
         <p:spPr>
           <a:xfrm>
             <a:off x="0" y="0"/>
-            <a:ext cx="9143640" cy="72720"/>
+            <a:ext cx="9143280" cy="72360"/>
           </a:xfrm>
           <a:prstGeom prst="rect">
             <a:avLst/>
@@ -6400,7 +6082,7 @@
         <p:spPr>
           <a:xfrm>
             <a:off x="5943600" y="-457200"/>
-            <a:ext cx="4571640" cy="4571640"/>
+            <a:ext cx="4571280" cy="4571280"/>
           </a:xfrm>
           <a:prstGeom prst="ellipse">
             <a:avLst/>
@@ -6433,7 +6115,7 @@
         <p:spPr>
           <a:xfrm>
             <a:off x="6858000" y="457200"/>
-            <a:ext cx="2742840" cy="2742840"/>
+            <a:ext cx="2742480" cy="2742480"/>
           </a:xfrm>
           <a:prstGeom prst="ellipse">
             <a:avLst/>
@@ -6466,7 +6148,7 @@
         <p:spPr>
           <a:xfrm>
             <a:off x="548640" y="914400"/>
-            <a:ext cx="7772040" cy="456840"/>
+            <a:ext cx="7771680" cy="456480"/>
           </a:xfrm>
           <a:prstGeom prst="rect">
             <a:avLst/>
@@ -6521,7 +6203,7 @@
         <p:spPr>
           <a:xfrm>
             <a:off x="548640" y="1463040"/>
-            <a:ext cx="7772040" cy="1462680"/>
+            <a:ext cx="7771680" cy="1462320"/>
           </a:xfrm>
           <a:prstGeom prst="rect">
             <a:avLst/>
@@ -6600,7 +6282,7 @@
         <p:spPr>
           <a:xfrm>
             <a:off x="548640" y="3108960"/>
-            <a:ext cx="1096920" cy="54360"/>
+            <a:ext cx="1096560" cy="54000"/>
           </a:xfrm>
           <a:prstGeom prst="rect">
             <a:avLst/>
@@ -6631,7 +6313,7 @@
         <p:spPr>
           <a:xfrm>
             <a:off x="548640" y="3291840"/>
-            <a:ext cx="7314840" cy="548280"/>
+            <a:ext cx="7314480" cy="547920"/>
           </a:xfrm>
           <a:prstGeom prst="rect">
             <a:avLst/>
@@ -6686,7 +6368,7 @@
         <p:spPr>
           <a:xfrm>
             <a:off x="0" y="4937760"/>
-            <a:ext cx="9143640" cy="205560"/>
+            <a:ext cx="9143280" cy="205200"/>
           </a:xfrm>
           <a:prstGeom prst="rect">
             <a:avLst/>
@@ -6717,7 +6399,7 @@
         <p:spPr>
           <a:xfrm>
             <a:off x="365760" y="4956120"/>
-            <a:ext cx="8229240" cy="182520"/>
+            <a:ext cx="8228880" cy="182160"/>
           </a:xfrm>
           <a:prstGeom prst="rect">
             <a:avLst/>
@@ -6809,7 +6491,7 @@
         <p:spPr>
           <a:xfrm>
             <a:off x="0" y="0"/>
-            <a:ext cx="9143640" cy="54360"/>
+            <a:ext cx="9143280" cy="54000"/>
           </a:xfrm>
           <a:prstGeom prst="rect">
             <a:avLst/>
@@ -6840,7 +6522,7 @@
         <p:spPr>
           <a:xfrm>
             <a:off x="365760" y="164520"/>
-            <a:ext cx="8229240" cy="502560"/>
+            <a:ext cx="8228880" cy="502200"/>
           </a:xfrm>
           <a:prstGeom prst="rect">
             <a:avLst/>
@@ -6895,7 +6577,7 @@
         <p:spPr>
           <a:xfrm>
             <a:off x="365760" y="704160"/>
-            <a:ext cx="8412120" cy="27000"/>
+            <a:ext cx="8411760" cy="26640"/>
           </a:xfrm>
           <a:prstGeom prst="rect">
             <a:avLst/>
@@ -6926,7 +6608,7 @@
         <p:spPr>
           <a:xfrm>
             <a:off x="365760" y="914400"/>
-            <a:ext cx="4114440" cy="365400"/>
+            <a:ext cx="4114080" cy="365040"/>
           </a:xfrm>
           <a:prstGeom prst="rect">
             <a:avLst/>
@@ -6991,7 +6673,7 @@
         <p:spPr>
           <a:xfrm>
             <a:off x="365760" y="1371600"/>
-            <a:ext cx="4114440" cy="2559960"/>
+            <a:ext cx="4114080" cy="2559600"/>
           </a:xfrm>
           <a:prstGeom prst="rect">
             <a:avLst/>
@@ -7022,7 +6704,7 @@
         <p:spPr>
           <a:xfrm>
             <a:off x="502920" y="1481400"/>
-            <a:ext cx="3840120" cy="2340360"/>
+            <a:ext cx="3839760" cy="2340000"/>
           </a:xfrm>
           <a:prstGeom prst="rect">
             <a:avLst/>
@@ -7387,7 +7069,7 @@
         <p:spPr>
           <a:xfrm>
             <a:off x="4663440" y="914400"/>
-            <a:ext cx="4114440" cy="365400"/>
+            <a:ext cx="4114080" cy="365040"/>
           </a:xfrm>
           <a:prstGeom prst="rect">
             <a:avLst/>
@@ -7452,7 +7134,7 @@
         <p:spPr>
           <a:xfrm>
             <a:off x="4663440" y="1371600"/>
-            <a:ext cx="4114440" cy="2559960"/>
+            <a:ext cx="4114080" cy="2559600"/>
           </a:xfrm>
           <a:prstGeom prst="rect">
             <a:avLst/>
@@ -7483,7 +7165,7 @@
         <p:spPr>
           <a:xfrm>
             <a:off x="4800600" y="1481400"/>
-            <a:ext cx="3840120" cy="2340360"/>
+            <a:ext cx="3839760" cy="2340000"/>
           </a:xfrm>
           <a:prstGeom prst="rect">
             <a:avLst/>
@@ -7818,7 +7500,7 @@
         <p:spPr>
           <a:xfrm>
             <a:off x="365760" y="4069080"/>
-            <a:ext cx="8412120" cy="822600"/>
+            <a:ext cx="8411760" cy="822240"/>
           </a:xfrm>
           <a:prstGeom prst="rect">
             <a:avLst/>
@@ -7856,7 +7538,7 @@
         <p:spPr>
           <a:xfrm>
             <a:off x="365760" y="4069080"/>
-            <a:ext cx="109440" cy="822600"/>
+            <a:ext cx="109080" cy="822240"/>
           </a:xfrm>
           <a:prstGeom prst="rect">
             <a:avLst/>
@@ -7887,7 +7569,7 @@
         <p:spPr>
           <a:xfrm>
             <a:off x="567000" y="4178880"/>
-            <a:ext cx="8119440" cy="255600"/>
+            <a:ext cx="8119080" cy="255240"/>
           </a:xfrm>
           <a:prstGeom prst="rect">
             <a:avLst/>
@@ -7942,7 +7624,7 @@
         <p:spPr>
           <a:xfrm>
             <a:off x="567000" y="4434840"/>
-            <a:ext cx="8119440" cy="365400"/>
+            <a:ext cx="8119080" cy="365040"/>
           </a:xfrm>
           <a:prstGeom prst="rect">
             <a:avLst/>
@@ -8034,7 +7716,7 @@
         <p:spPr>
           <a:xfrm>
             <a:off x="0" y="0"/>
-            <a:ext cx="9143640" cy="54360"/>
+            <a:ext cx="9143280" cy="54000"/>
           </a:xfrm>
           <a:prstGeom prst="rect">
             <a:avLst/>
@@ -8065,7 +7747,7 @@
         <p:spPr>
           <a:xfrm>
             <a:off x="365760" y="164520"/>
-            <a:ext cx="8229240" cy="502560"/>
+            <a:ext cx="8228880" cy="502200"/>
           </a:xfrm>
           <a:prstGeom prst="rect">
             <a:avLst/>
@@ -8120,7 +7802,7 @@
         <p:spPr>
           <a:xfrm>
             <a:off x="365760" y="704160"/>
-            <a:ext cx="8412120" cy="27000"/>
+            <a:ext cx="8411760" cy="26640"/>
           </a:xfrm>
           <a:prstGeom prst="rect">
             <a:avLst/>
@@ -8151,7 +7833,7 @@
         <p:spPr>
           <a:xfrm>
             <a:off x="365760" y="822960"/>
-            <a:ext cx="8412120" cy="3200040"/>
+            <a:ext cx="8411760" cy="3199680"/>
           </a:xfrm>
           <a:prstGeom prst="rect">
             <a:avLst/>
@@ -8182,7 +7864,7 @@
         <p:spPr>
           <a:xfrm>
             <a:off x="502920" y="932760"/>
-            <a:ext cx="8137800" cy="2980440"/>
+            <a:ext cx="8137440" cy="2980080"/>
           </a:xfrm>
           <a:prstGeom prst="rect">
             <a:avLst/>
@@ -8685,7 +8367,7 @@
         <p:spPr>
           <a:xfrm>
             <a:off x="365760" y="4160520"/>
-            <a:ext cx="4023000" cy="319680"/>
+            <a:ext cx="4022640" cy="319320"/>
           </a:xfrm>
           <a:prstGeom prst="rect">
             <a:avLst/>
@@ -8740,7 +8422,7 @@
         <p:spPr>
           <a:xfrm>
             <a:off x="389520" y="4454280"/>
-            <a:ext cx="8412120" cy="548280"/>
+            <a:ext cx="8411760" cy="547920"/>
           </a:xfrm>
           <a:prstGeom prst="rect">
             <a:avLst/>
@@ -8768,7 +8450,7 @@
               <a:buClr>
                 <a:srgbClr val="e8f4f8"/>
               </a:buClr>
-              <a:buFont typeface="Symbol" charset="2"/>
+              <a:buFont typeface="Symbol"/>
               <a:buChar char=""/>
             </a:pPr>
             <a:r>
@@ -8793,7 +8475,7 @@
               <a:buClr>
                 <a:srgbClr val="e8f4f8"/>
               </a:buClr>
-              <a:buFont typeface="Symbol" charset="2"/>
+              <a:buFont typeface="Symbol"/>
               <a:buChar char=""/>
             </a:pPr>
             <a:r>
@@ -8818,7 +8500,7 @@
               <a:buClr>
                 <a:srgbClr val="e8f4f8"/>
               </a:buClr>
-              <a:buFont typeface="Symbol" charset="2"/>
+              <a:buFont typeface="Symbol"/>
               <a:buChar char=""/>
             </a:pPr>
             <a:r>
@@ -8883,7 +8565,7 @@
         <p:spPr>
           <a:xfrm>
             <a:off x="0" y="0"/>
-            <a:ext cx="9143640" cy="54360"/>
+            <a:ext cx="9143280" cy="54000"/>
           </a:xfrm>
           <a:prstGeom prst="rect">
             <a:avLst/>
@@ -8914,7 +8596,7 @@
         <p:spPr>
           <a:xfrm>
             <a:off x="365760" y="164520"/>
-            <a:ext cx="8229240" cy="502560"/>
+            <a:ext cx="8228880" cy="502200"/>
           </a:xfrm>
           <a:prstGeom prst="rect">
             <a:avLst/>
@@ -8969,7 +8651,7 @@
         <p:spPr>
           <a:xfrm>
             <a:off x="365760" y="704160"/>
-            <a:ext cx="8412120" cy="27000"/>
+            <a:ext cx="8411760" cy="26640"/>
           </a:xfrm>
           <a:prstGeom prst="rect">
             <a:avLst/>
@@ -9000,7 +8682,7 @@
         <p:spPr>
           <a:xfrm>
             <a:off x="365760" y="868680"/>
-            <a:ext cx="8412120" cy="411120"/>
+            <a:ext cx="8411760" cy="410760"/>
           </a:xfrm>
           <a:prstGeom prst="rect">
             <a:avLst/>
@@ -9055,7 +8737,7 @@
         <p:spPr>
           <a:xfrm>
             <a:off x="365760" y="1417320"/>
-            <a:ext cx="4023000" cy="319680"/>
+            <a:ext cx="4022640" cy="319320"/>
           </a:xfrm>
           <a:prstGeom prst="rect">
             <a:avLst/>
@@ -9110,7 +8792,7 @@
         <p:spPr>
           <a:xfrm>
             <a:off x="365760" y="1828800"/>
-            <a:ext cx="4114440" cy="2285640"/>
+            <a:ext cx="4114080" cy="2285280"/>
           </a:xfrm>
           <a:prstGeom prst="rect">
             <a:avLst/>
@@ -9141,7 +8823,7 @@
         <p:spPr>
           <a:xfrm>
             <a:off x="502920" y="1938600"/>
-            <a:ext cx="3840120" cy="2066040"/>
+            <a:ext cx="3839760" cy="2065680"/>
           </a:xfrm>
           <a:prstGeom prst="rect">
             <a:avLst/>
@@ -9456,7 +9138,7 @@
         <p:spPr>
           <a:xfrm>
             <a:off x="4663440" y="1417320"/>
-            <a:ext cx="4023000" cy="319680"/>
+            <a:ext cx="4022640" cy="319320"/>
           </a:xfrm>
           <a:prstGeom prst="rect">
             <a:avLst/>
@@ -9511,7 +9193,7 @@
         <p:spPr>
           <a:xfrm>
             <a:off x="4663440" y="1828800"/>
-            <a:ext cx="4114440" cy="2285640"/>
+            <a:ext cx="4114080" cy="2285280"/>
           </a:xfrm>
           <a:prstGeom prst="rect">
             <a:avLst/>
@@ -9542,7 +9224,7 @@
         <p:spPr>
           <a:xfrm>
             <a:off x="4800600" y="1938600"/>
-            <a:ext cx="3840120" cy="2066040"/>
+            <a:ext cx="3839760" cy="2065680"/>
           </a:xfrm>
           <a:prstGeom prst="rect">
             <a:avLst/>
@@ -9891,7 +9573,7 @@
         <p:spPr>
           <a:xfrm>
             <a:off x="365760" y="4251960"/>
-            <a:ext cx="8454240" cy="788040"/>
+            <a:ext cx="8453880" cy="787680"/>
           </a:xfrm>
           <a:prstGeom prst="rect">
             <a:avLst/>
@@ -9929,7 +9611,7 @@
         <p:spPr>
           <a:xfrm>
             <a:off x="365760" y="4251960"/>
-            <a:ext cx="109440" cy="639720"/>
+            <a:ext cx="109080" cy="639360"/>
           </a:xfrm>
           <a:prstGeom prst="rect">
             <a:avLst/>
@@ -9960,7 +9642,7 @@
         <p:spPr>
           <a:xfrm>
             <a:off x="567000" y="4244400"/>
-            <a:ext cx="8119440" cy="255600"/>
+            <a:ext cx="8119080" cy="255240"/>
           </a:xfrm>
           <a:prstGeom prst="rect">
             <a:avLst/>
@@ -10015,7 +9697,7 @@
         <p:spPr>
           <a:xfrm>
             <a:off x="567000" y="4500000"/>
-            <a:ext cx="8119440" cy="182520"/>
+            <a:ext cx="8119080" cy="182160"/>
           </a:xfrm>
           <a:prstGeom prst="rect">
             <a:avLst/>
@@ -10107,7 +9789,7 @@
         <p:spPr>
           <a:xfrm>
             <a:off x="0" y="0"/>
-            <a:ext cx="9143640" cy="54360"/>
+            <a:ext cx="9143280" cy="54000"/>
           </a:xfrm>
           <a:prstGeom prst="rect">
             <a:avLst/>
@@ -10138,7 +9820,7 @@
         <p:spPr>
           <a:xfrm>
             <a:off x="365760" y="164520"/>
-            <a:ext cx="8229240" cy="502560"/>
+            <a:ext cx="8228880" cy="502200"/>
           </a:xfrm>
           <a:prstGeom prst="rect">
             <a:avLst/>
@@ -10193,7 +9875,7 @@
         <p:spPr>
           <a:xfrm>
             <a:off x="365760" y="704160"/>
-            <a:ext cx="8412120" cy="27000"/>
+            <a:ext cx="8411760" cy="26640"/>
           </a:xfrm>
           <a:prstGeom prst="rect">
             <a:avLst/>
@@ -10224,7 +9906,7 @@
         <p:spPr>
           <a:xfrm>
             <a:off x="365760" y="868680"/>
-            <a:ext cx="8412120" cy="914040"/>
+            <a:ext cx="8411760" cy="913680"/>
           </a:xfrm>
           <a:prstGeom prst="rect">
             <a:avLst/>
@@ -10262,7 +9944,7 @@
         <p:spPr>
           <a:xfrm>
             <a:off x="365760" y="868680"/>
-            <a:ext cx="109440" cy="914040"/>
+            <a:ext cx="109080" cy="913680"/>
           </a:xfrm>
           <a:prstGeom prst="rect">
             <a:avLst/>
@@ -10293,7 +9975,7 @@
         <p:spPr>
           <a:xfrm>
             <a:off x="567000" y="978480"/>
-            <a:ext cx="8119440" cy="255600"/>
+            <a:ext cx="8119080" cy="255240"/>
           </a:xfrm>
           <a:prstGeom prst="rect">
             <a:avLst/>
@@ -10348,7 +10030,7 @@
         <p:spPr>
           <a:xfrm>
             <a:off x="567000" y="1234440"/>
-            <a:ext cx="8119440" cy="456840"/>
+            <a:ext cx="8119080" cy="456480"/>
           </a:xfrm>
           <a:prstGeom prst="rect">
             <a:avLst/>
@@ -10403,7 +10085,7 @@
         <p:spPr>
           <a:xfrm>
             <a:off x="365760" y="1920240"/>
-            <a:ext cx="8412120" cy="2834280"/>
+            <a:ext cx="8411760" cy="2833920"/>
           </a:xfrm>
           <a:prstGeom prst="rect">
             <a:avLst/>
@@ -10434,7 +10116,7 @@
         <p:spPr>
           <a:xfrm>
             <a:off x="502920" y="2030040"/>
-            <a:ext cx="8137800" cy="2614680"/>
+            <a:ext cx="8137440" cy="2614320"/>
           </a:xfrm>
           <a:prstGeom prst="rect">
             <a:avLst/>
@@ -10953,7 +10635,7 @@
         <p:spPr>
           <a:xfrm>
             <a:off x="365760" y="4827960"/>
-            <a:ext cx="8412120" cy="273960"/>
+            <a:ext cx="8411760" cy="273600"/>
           </a:xfrm>
           <a:prstGeom prst="rect">
             <a:avLst/>
@@ -11045,7 +10727,7 @@
         <p:spPr>
           <a:xfrm>
             <a:off x="0" y="0"/>
-            <a:ext cx="9143640" cy="54360"/>
+            <a:ext cx="9143280" cy="54000"/>
           </a:xfrm>
           <a:prstGeom prst="rect">
             <a:avLst/>
@@ -11076,7 +10758,7 @@
         <p:spPr>
           <a:xfrm>
             <a:off x="365760" y="164520"/>
-            <a:ext cx="8229240" cy="502560"/>
+            <a:ext cx="8228880" cy="502200"/>
           </a:xfrm>
           <a:prstGeom prst="rect">
             <a:avLst/>
@@ -11131,7 +10813,7 @@
         <p:spPr>
           <a:xfrm>
             <a:off x="365760" y="704160"/>
-            <a:ext cx="8412120" cy="27000"/>
+            <a:ext cx="8411760" cy="26640"/>
           </a:xfrm>
           <a:prstGeom prst="rect">
             <a:avLst/>
@@ -11162,7 +10844,7 @@
         <p:spPr>
           <a:xfrm>
             <a:off x="365760" y="960120"/>
-            <a:ext cx="411120" cy="383760"/>
+            <a:ext cx="410760" cy="383400"/>
           </a:xfrm>
           <a:prstGeom prst="ellipse">
             <a:avLst/>
@@ -11193,7 +10875,7 @@
         <p:spPr>
           <a:xfrm>
             <a:off x="365760" y="969120"/>
-            <a:ext cx="411120" cy="347040"/>
+            <a:ext cx="410760" cy="346680"/>
           </a:xfrm>
           <a:prstGeom prst="rect">
             <a:avLst/>
@@ -11248,7 +10930,7 @@
         <p:spPr>
           <a:xfrm>
             <a:off x="914400" y="978480"/>
-            <a:ext cx="7863480" cy="365400"/>
+            <a:ext cx="7863120" cy="365040"/>
           </a:xfrm>
           <a:prstGeom prst="rect">
             <a:avLst/>
@@ -11303,7 +10985,7 @@
         <p:spPr>
           <a:xfrm>
             <a:off x="365760" y="1618560"/>
-            <a:ext cx="411120" cy="383760"/>
+            <a:ext cx="410760" cy="383400"/>
           </a:xfrm>
           <a:prstGeom prst="ellipse">
             <a:avLst/>
@@ -11334,7 +11016,7 @@
         <p:spPr>
           <a:xfrm>
             <a:off x="365760" y="1627560"/>
-            <a:ext cx="411120" cy="347040"/>
+            <a:ext cx="410760" cy="346680"/>
           </a:xfrm>
           <a:prstGeom prst="rect">
             <a:avLst/>
@@ -11389,7 +11071,7 @@
         <p:spPr>
           <a:xfrm>
             <a:off x="914400" y="1636920"/>
-            <a:ext cx="7863480" cy="365400"/>
+            <a:ext cx="7863120" cy="365040"/>
           </a:xfrm>
           <a:prstGeom prst="rect">
             <a:avLst/>
@@ -11444,7 +11126,7 @@
         <p:spPr>
           <a:xfrm>
             <a:off x="365760" y="2277000"/>
-            <a:ext cx="411120" cy="383760"/>
+            <a:ext cx="410760" cy="383400"/>
           </a:xfrm>
           <a:prstGeom prst="ellipse">
             <a:avLst/>
@@ -11475,7 +11157,7 @@
         <p:spPr>
           <a:xfrm>
             <a:off x="365760" y="2286000"/>
-            <a:ext cx="411120" cy="347040"/>
+            <a:ext cx="410760" cy="346680"/>
           </a:xfrm>
           <a:prstGeom prst="rect">
             <a:avLst/>
@@ -11530,7 +11212,7 @@
         <p:spPr>
           <a:xfrm>
             <a:off x="914400" y="2295000"/>
-            <a:ext cx="7863480" cy="365400"/>
+            <a:ext cx="7863120" cy="365040"/>
           </a:xfrm>
           <a:prstGeom prst="rect">
             <a:avLst/>
@@ -11585,7 +11267,7 @@
         <p:spPr>
           <a:xfrm>
             <a:off x="365760" y="2935080"/>
-            <a:ext cx="411120" cy="383760"/>
+            <a:ext cx="410760" cy="383400"/>
           </a:xfrm>
           <a:prstGeom prst="ellipse">
             <a:avLst/>
@@ -11616,7 +11298,7 @@
         <p:spPr>
           <a:xfrm>
             <a:off x="365760" y="2944440"/>
-            <a:ext cx="411120" cy="347040"/>
+            <a:ext cx="410760" cy="346680"/>
           </a:xfrm>
           <a:prstGeom prst="rect">
             <a:avLst/>
@@ -11671,7 +11353,7 @@
         <p:spPr>
           <a:xfrm>
             <a:off x="914400" y="2953440"/>
-            <a:ext cx="7863480" cy="365400"/>
+            <a:ext cx="7863120" cy="365040"/>
           </a:xfrm>
           <a:prstGeom prst="rect">
             <a:avLst/>
@@ -11726,7 +11408,7 @@
         <p:spPr>
           <a:xfrm>
             <a:off x="365760" y="3593520"/>
-            <a:ext cx="411120" cy="383760"/>
+            <a:ext cx="410760" cy="383400"/>
           </a:xfrm>
           <a:prstGeom prst="ellipse">
             <a:avLst/>
@@ -11757,7 +11439,7 @@
         <p:spPr>
           <a:xfrm>
             <a:off x="365760" y="3602880"/>
-            <a:ext cx="411120" cy="347040"/>
+            <a:ext cx="410760" cy="346680"/>
           </a:xfrm>
           <a:prstGeom prst="rect">
             <a:avLst/>
@@ -11812,7 +11494,7 @@
         <p:spPr>
           <a:xfrm>
             <a:off x="914400" y="3611880"/>
-            <a:ext cx="7863480" cy="365400"/>
+            <a:ext cx="7863120" cy="365040"/>
           </a:xfrm>
           <a:prstGeom prst="rect">
             <a:avLst/>
@@ -11867,7 +11549,7 @@
         <p:spPr>
           <a:xfrm>
             <a:off x="365760" y="4251960"/>
-            <a:ext cx="411120" cy="383760"/>
+            <a:ext cx="410760" cy="383400"/>
           </a:xfrm>
           <a:prstGeom prst="ellipse">
             <a:avLst/>
@@ -11898,7 +11580,7 @@
         <p:spPr>
           <a:xfrm>
             <a:off x="365760" y="4260960"/>
-            <a:ext cx="411120" cy="347040"/>
+            <a:ext cx="410760" cy="346680"/>
           </a:xfrm>
           <a:prstGeom prst="rect">
             <a:avLst/>
@@ -11953,7 +11635,7 @@
         <p:spPr>
           <a:xfrm>
             <a:off x="914400" y="4270320"/>
-            <a:ext cx="7863480" cy="365400"/>
+            <a:ext cx="7863120" cy="365040"/>
           </a:xfrm>
           <a:prstGeom prst="rect">
             <a:avLst/>
@@ -12008,7 +11690,7 @@
         <p:spPr>
           <a:xfrm>
             <a:off x="365760" y="4773240"/>
-            <a:ext cx="8412120" cy="200880"/>
+            <a:ext cx="8411760" cy="200520"/>
           </a:xfrm>
           <a:prstGeom prst="rect">
             <a:avLst/>
@@ -12039,7 +11721,7 @@
         <p:spPr>
           <a:xfrm>
             <a:off x="457200" y="4773240"/>
-            <a:ext cx="8229240" cy="200880"/>
+            <a:ext cx="8228880" cy="200520"/>
           </a:xfrm>
           <a:prstGeom prst="rect">
             <a:avLst/>
@@ -12131,7 +11813,7 @@
         <p:spPr>
           <a:xfrm>
             <a:off x="0" y="0"/>
-            <a:ext cx="9143640" cy="54360"/>
+            <a:ext cx="9143280" cy="54000"/>
           </a:xfrm>
           <a:prstGeom prst="rect">
             <a:avLst/>
@@ -12162,7 +11844,7 @@
         <p:spPr>
           <a:xfrm>
             <a:off x="365760" y="164520"/>
-            <a:ext cx="8229240" cy="502560"/>
+            <a:ext cx="8228880" cy="502200"/>
           </a:xfrm>
           <a:prstGeom prst="rect">
             <a:avLst/>
@@ -12217,7 +11899,7 @@
         <p:spPr>
           <a:xfrm>
             <a:off x="365760" y="704160"/>
-            <a:ext cx="8412120" cy="27000"/>
+            <a:ext cx="8411760" cy="26640"/>
           </a:xfrm>
           <a:prstGeom prst="rect">
             <a:avLst/>
@@ -12248,7 +11930,7 @@
         <p:spPr>
           <a:xfrm>
             <a:off x="365760" y="932760"/>
-            <a:ext cx="8412120" cy="658080"/>
+            <a:ext cx="8411760" cy="657720"/>
           </a:xfrm>
           <a:prstGeom prst="rect">
             <a:avLst/>
@@ -12279,7 +11961,7 @@
         <p:spPr>
           <a:xfrm>
             <a:off x="548640" y="978480"/>
-            <a:ext cx="3474360" cy="328680"/>
+            <a:ext cx="3474000" cy="328320"/>
           </a:xfrm>
           <a:prstGeom prst="rect">
             <a:avLst/>
@@ -12344,7 +12026,7 @@
         <p:spPr>
           <a:xfrm>
             <a:off x="548640" y="1307520"/>
-            <a:ext cx="8046360" cy="273960"/>
+            <a:ext cx="8046000" cy="273600"/>
           </a:xfrm>
           <a:prstGeom prst="rect">
             <a:avLst/>
@@ -12399,7 +12081,7 @@
         <p:spPr>
           <a:xfrm>
             <a:off x="365760" y="1710000"/>
-            <a:ext cx="8412120" cy="658080"/>
+            <a:ext cx="8411760" cy="657720"/>
           </a:xfrm>
           <a:prstGeom prst="rect">
             <a:avLst/>
@@ -12430,7 +12112,7 @@
         <p:spPr>
           <a:xfrm>
             <a:off x="548640" y="1755720"/>
-            <a:ext cx="3474360" cy="328680"/>
+            <a:ext cx="3474000" cy="328320"/>
           </a:xfrm>
           <a:prstGeom prst="rect">
             <a:avLst/>
@@ -12495,7 +12177,7 @@
         <p:spPr>
           <a:xfrm>
             <a:off x="548640" y="2084760"/>
-            <a:ext cx="8046360" cy="273960"/>
+            <a:ext cx="8046000" cy="273600"/>
           </a:xfrm>
           <a:prstGeom prst="rect">
             <a:avLst/>
@@ -12550,7 +12232,7 @@
         <p:spPr>
           <a:xfrm>
             <a:off x="365760" y="2487240"/>
-            <a:ext cx="8412120" cy="658080"/>
+            <a:ext cx="8411760" cy="657720"/>
           </a:xfrm>
           <a:prstGeom prst="rect">
             <a:avLst/>
@@ -12581,7 +12263,7 @@
         <p:spPr>
           <a:xfrm>
             <a:off x="548640" y="2532960"/>
-            <a:ext cx="3474360" cy="328680"/>
+            <a:ext cx="3474000" cy="328320"/>
           </a:xfrm>
           <a:prstGeom prst="rect">
             <a:avLst/>
@@ -12646,7 +12328,7 @@
         <p:spPr>
           <a:xfrm>
             <a:off x="548640" y="2862000"/>
-            <a:ext cx="8046360" cy="273960"/>
+            <a:ext cx="8046000" cy="273600"/>
           </a:xfrm>
           <a:prstGeom prst="rect">
             <a:avLst/>
@@ -12701,7 +12383,7 @@
         <p:spPr>
           <a:xfrm>
             <a:off x="365760" y="3264480"/>
-            <a:ext cx="8412120" cy="658080"/>
+            <a:ext cx="8411760" cy="657720"/>
           </a:xfrm>
           <a:prstGeom prst="rect">
             <a:avLst/>
@@ -12732,7 +12414,7 @@
         <p:spPr>
           <a:xfrm>
             <a:off x="548640" y="3310200"/>
-            <a:ext cx="3474360" cy="328680"/>
+            <a:ext cx="3474000" cy="328320"/>
           </a:xfrm>
           <a:prstGeom prst="rect">
             <a:avLst/>
@@ -12797,7 +12479,7 @@
         <p:spPr>
           <a:xfrm>
             <a:off x="548640" y="3639240"/>
-            <a:ext cx="8046360" cy="273960"/>
+            <a:ext cx="8046000" cy="273600"/>
           </a:xfrm>
           <a:prstGeom prst="rect">
             <a:avLst/>
@@ -12852,7 +12534,7 @@
         <p:spPr>
           <a:xfrm>
             <a:off x="365760" y="4041720"/>
-            <a:ext cx="8412120" cy="658080"/>
+            <a:ext cx="8411760" cy="657720"/>
           </a:xfrm>
           <a:prstGeom prst="rect">
             <a:avLst/>
@@ -12883,7 +12565,7 @@
         <p:spPr>
           <a:xfrm>
             <a:off x="548640" y="4087440"/>
-            <a:ext cx="3474360" cy="328680"/>
+            <a:ext cx="3474000" cy="328320"/>
           </a:xfrm>
           <a:prstGeom prst="rect">
             <a:avLst/>
@@ -12948,7 +12630,7 @@
         <p:spPr>
           <a:xfrm>
             <a:off x="548640" y="4416480"/>
-            <a:ext cx="8046360" cy="273960"/>
+            <a:ext cx="8046000" cy="273600"/>
           </a:xfrm>
           <a:prstGeom prst="rect">
             <a:avLst/>
@@ -13040,7 +12722,7 @@
         <p:spPr>
           <a:xfrm>
             <a:off x="0" y="0"/>
-            <a:ext cx="9143640" cy="54360"/>
+            <a:ext cx="9143280" cy="54000"/>
           </a:xfrm>
           <a:prstGeom prst="rect">
             <a:avLst/>
@@ -13071,7 +12753,7 @@
         <p:spPr>
           <a:xfrm>
             <a:off x="365760" y="164520"/>
-            <a:ext cx="8229240" cy="502560"/>
+            <a:ext cx="8228880" cy="502200"/>
           </a:xfrm>
           <a:prstGeom prst="rect">
             <a:avLst/>
@@ -13126,7 +12808,7 @@
         <p:spPr>
           <a:xfrm>
             <a:off x="365760" y="704160"/>
-            <a:ext cx="8412120" cy="27000"/>
+            <a:ext cx="8411760" cy="26640"/>
           </a:xfrm>
           <a:prstGeom prst="rect">
             <a:avLst/>
@@ -13157,7 +12839,7 @@
         <p:spPr>
           <a:xfrm>
             <a:off x="365760" y="868680"/>
-            <a:ext cx="8412120" cy="914040"/>
+            <a:ext cx="8411760" cy="913680"/>
           </a:xfrm>
           <a:prstGeom prst="rect">
             <a:avLst/>
@@ -13195,7 +12877,7 @@
         <p:spPr>
           <a:xfrm>
             <a:off x="365760" y="868680"/>
-            <a:ext cx="109440" cy="914040"/>
+            <a:ext cx="109080" cy="913680"/>
           </a:xfrm>
           <a:prstGeom prst="rect">
             <a:avLst/>
@@ -13226,7 +12908,7 @@
         <p:spPr>
           <a:xfrm>
             <a:off x="567000" y="978480"/>
-            <a:ext cx="8119440" cy="255600"/>
+            <a:ext cx="8119080" cy="255240"/>
           </a:xfrm>
           <a:prstGeom prst="rect">
             <a:avLst/>
@@ -13281,7 +12963,7 @@
         <p:spPr>
           <a:xfrm>
             <a:off x="567000" y="1234440"/>
-            <a:ext cx="8119440" cy="456840"/>
+            <a:ext cx="8119080" cy="456480"/>
           </a:xfrm>
           <a:prstGeom prst="rect">
             <a:avLst/>
@@ -13336,7 +13018,7 @@
         <p:spPr>
           <a:xfrm>
             <a:off x="365760" y="1874520"/>
-            <a:ext cx="8412120" cy="456840"/>
+            <a:ext cx="8411760" cy="456480"/>
           </a:xfrm>
           <a:prstGeom prst="rect">
             <a:avLst/>
@@ -13401,7 +13083,7 @@
         <p:spPr>
           <a:xfrm>
             <a:off x="365760" y="2423160"/>
-            <a:ext cx="8412120" cy="2285640"/>
+            <a:ext cx="8411760" cy="2285280"/>
           </a:xfrm>
           <a:prstGeom prst="rect">
             <a:avLst/>
@@ -13432,7 +13114,7 @@
         <p:spPr>
           <a:xfrm>
             <a:off x="502920" y="2532960"/>
-            <a:ext cx="8137800" cy="2066040"/>
+            <a:ext cx="8137440" cy="2065680"/>
           </a:xfrm>
           <a:prstGeom prst="rect">
             <a:avLst/>
@@ -13723,7 +13405,7 @@
         <p:spPr>
           <a:xfrm>
             <a:off x="365760" y="4827960"/>
-            <a:ext cx="8412120" cy="182520"/>
+            <a:ext cx="8411760" cy="182160"/>
           </a:xfrm>
           <a:prstGeom prst="rect">
             <a:avLst/>
@@ -13754,7 +13436,7 @@
         <p:spPr>
           <a:xfrm>
             <a:off x="457200" y="4837320"/>
-            <a:ext cx="8229240" cy="182520"/>
+            <a:ext cx="8228880" cy="182160"/>
           </a:xfrm>
           <a:prstGeom prst="rect">
             <a:avLst/>
@@ -13846,7 +13528,7 @@
         <p:spPr>
           <a:xfrm>
             <a:off x="0" y="0"/>
-            <a:ext cx="9143640" cy="54360"/>
+            <a:ext cx="9143280" cy="54000"/>
           </a:xfrm>
           <a:prstGeom prst="rect">
             <a:avLst/>
@@ -13877,7 +13559,7 @@
         <p:spPr>
           <a:xfrm>
             <a:off x="365760" y="164520"/>
-            <a:ext cx="8229240" cy="502560"/>
+            <a:ext cx="8228880" cy="502200"/>
           </a:xfrm>
           <a:prstGeom prst="rect">
             <a:avLst/>
@@ -13932,7 +13614,7 @@
         <p:spPr>
           <a:xfrm>
             <a:off x="365760" y="704160"/>
-            <a:ext cx="8412120" cy="27000"/>
+            <a:ext cx="8411760" cy="26640"/>
           </a:xfrm>
           <a:prstGeom prst="rect">
             <a:avLst/>
@@ -13963,7 +13645,7 @@
         <p:spPr>
           <a:xfrm>
             <a:off x="365760" y="868680"/>
-            <a:ext cx="8454240" cy="3991320"/>
+            <a:ext cx="8453880" cy="3990960"/>
           </a:xfrm>
           <a:prstGeom prst="rect">
             <a:avLst/>
@@ -13994,7 +13676,7 @@
         <p:spPr>
           <a:xfrm>
             <a:off x="502920" y="978480"/>
-            <a:ext cx="8137800" cy="3437640"/>
+            <a:ext cx="8137440" cy="3437280"/>
           </a:xfrm>
           <a:prstGeom prst="rect">
             <a:avLst/>
@@ -14691,7 +14373,7 @@
         <p:spPr>
           <a:xfrm>
             <a:off x="360000" y="5440320"/>
-            <a:ext cx="8460000" cy="679680"/>
+            <a:ext cx="8459640" cy="679320"/>
           </a:xfrm>
           <a:prstGeom prst="rect">
             <a:avLst/>
@@ -14729,7 +14411,7 @@
         <p:spPr>
           <a:xfrm>
             <a:off x="360000" y="5580000"/>
-            <a:ext cx="109440" cy="360"/>
+            <a:ext cx="109080" cy="360"/>
           </a:xfrm>
           <a:prstGeom prst="rect">
             <a:avLst/>
@@ -14760,7 +14442,7 @@
         <p:spPr>
           <a:xfrm>
             <a:off x="540000" y="5400000"/>
-            <a:ext cx="8119440" cy="255600"/>
+            <a:ext cx="8119080" cy="255240"/>
           </a:xfrm>
           <a:prstGeom prst="rect">
             <a:avLst/>
@@ -14815,7 +14497,7 @@
         <p:spPr>
           <a:xfrm>
             <a:off x="340560" y="5580000"/>
-            <a:ext cx="8119440" cy="136800"/>
+            <a:ext cx="8119080" cy="136440"/>
           </a:xfrm>
           <a:prstGeom prst="rect">
             <a:avLst/>
@@ -14832,7 +14514,7 @@
           <a:fontRef idx="minor"/>
         </p:style>
         <p:txBody>
-          <a:bodyPr lIns="90000" rIns="90000" tIns="90000" bIns="90000" anchor="t">
+          <a:bodyPr lIns="90000" rIns="90000" tIns="136800" bIns="136800" anchor="t">
             <a:noAutofit/>
           </a:bodyPr>
           <a:p>
@@ -14907,7 +14589,7 @@
         <p:spPr>
           <a:xfrm>
             <a:off x="0" y="0"/>
-            <a:ext cx="228240" cy="5143320"/>
+            <a:ext cx="227880" cy="5142960"/>
           </a:xfrm>
           <a:prstGeom prst="rect">
             <a:avLst/>
@@ -14938,7 +14620,7 @@
         <p:spPr>
           <a:xfrm>
             <a:off x="0" y="0"/>
-            <a:ext cx="9143640" cy="54360"/>
+            <a:ext cx="9143280" cy="54000"/>
           </a:xfrm>
           <a:prstGeom prst="rect">
             <a:avLst/>
@@ -14969,7 +14651,7 @@
         <p:spPr>
           <a:xfrm>
             <a:off x="548640" y="1097280"/>
-            <a:ext cx="7772040" cy="456840"/>
+            <a:ext cx="7771680" cy="456480"/>
           </a:xfrm>
           <a:prstGeom prst="rect">
             <a:avLst/>
@@ -15024,7 +14706,7 @@
         <p:spPr>
           <a:xfrm>
             <a:off x="548640" y="1554480"/>
-            <a:ext cx="7772040" cy="1371240"/>
+            <a:ext cx="7771680" cy="1370880"/>
           </a:xfrm>
           <a:prstGeom prst="rect">
             <a:avLst/>
@@ -15079,7 +14761,7 @@
         <p:spPr>
           <a:xfrm>
             <a:off x="548640" y="3017520"/>
-            <a:ext cx="7314840" cy="639720"/>
+            <a:ext cx="7314480" cy="639360"/>
           </a:xfrm>
           <a:prstGeom prst="rect">
             <a:avLst/>
@@ -15171,7 +14853,7 @@
         <p:spPr>
           <a:xfrm>
             <a:off x="0" y="0"/>
-            <a:ext cx="9143640" cy="54360"/>
+            <a:ext cx="9143280" cy="54000"/>
           </a:xfrm>
           <a:prstGeom prst="rect">
             <a:avLst/>
@@ -15202,7 +14884,7 @@
         <p:spPr>
           <a:xfrm>
             <a:off x="365760" y="164520"/>
-            <a:ext cx="8229240" cy="502560"/>
+            <a:ext cx="8228880" cy="502200"/>
           </a:xfrm>
           <a:prstGeom prst="rect">
             <a:avLst/>
@@ -15257,7 +14939,7 @@
         <p:spPr>
           <a:xfrm>
             <a:off x="365760" y="704160"/>
-            <a:ext cx="8412120" cy="27000"/>
+            <a:ext cx="8411760" cy="26640"/>
           </a:xfrm>
           <a:prstGeom prst="rect">
             <a:avLst/>
@@ -15288,7 +14970,7 @@
         <p:spPr>
           <a:xfrm>
             <a:off x="365760" y="914400"/>
-            <a:ext cx="4023000" cy="1051200"/>
+            <a:ext cx="4022640" cy="1050840"/>
           </a:xfrm>
           <a:prstGeom prst="rect">
             <a:avLst/>
@@ -15319,7 +15001,7 @@
         <p:spPr>
           <a:xfrm>
             <a:off x="530280" y="1005840"/>
-            <a:ext cx="3657240" cy="319680"/>
+            <a:ext cx="3656880" cy="319320"/>
           </a:xfrm>
           <a:prstGeom prst="rect">
             <a:avLst/>
@@ -15374,7 +15056,7 @@
         <p:spPr>
           <a:xfrm>
             <a:off x="530280" y="1325880"/>
-            <a:ext cx="3657240" cy="273960"/>
+            <a:ext cx="3656880" cy="273600"/>
           </a:xfrm>
           <a:prstGeom prst="rect">
             <a:avLst/>
@@ -15429,7 +15111,7 @@
         <p:spPr>
           <a:xfrm>
             <a:off x="530280" y="1600200"/>
-            <a:ext cx="3657240" cy="255600"/>
+            <a:ext cx="3656880" cy="255240"/>
           </a:xfrm>
           <a:prstGeom prst="rect">
             <a:avLst/>
@@ -15484,7 +15166,7 @@
         <p:spPr>
           <a:xfrm>
             <a:off x="365760" y="2194560"/>
-            <a:ext cx="4023000" cy="1051200"/>
+            <a:ext cx="4022640" cy="1050840"/>
           </a:xfrm>
           <a:prstGeom prst="rect">
             <a:avLst/>
@@ -15515,7 +15197,7 @@
         <p:spPr>
           <a:xfrm>
             <a:off x="530280" y="2286000"/>
-            <a:ext cx="3657240" cy="319680"/>
+            <a:ext cx="3656880" cy="319320"/>
           </a:xfrm>
           <a:prstGeom prst="rect">
             <a:avLst/>
@@ -15570,7 +15252,7 @@
         <p:spPr>
           <a:xfrm>
             <a:off x="530280" y="2606040"/>
-            <a:ext cx="3657240" cy="273960"/>
+            <a:ext cx="3656880" cy="273600"/>
           </a:xfrm>
           <a:prstGeom prst="rect">
             <a:avLst/>
@@ -15625,7 +15307,7 @@
         <p:spPr>
           <a:xfrm>
             <a:off x="530280" y="2880360"/>
-            <a:ext cx="3657240" cy="255600"/>
+            <a:ext cx="3656880" cy="255240"/>
           </a:xfrm>
           <a:prstGeom prst="rect">
             <a:avLst/>
@@ -15680,7 +15362,7 @@
         <p:spPr>
           <a:xfrm>
             <a:off x="365760" y="3474720"/>
-            <a:ext cx="4023000" cy="1051200"/>
+            <a:ext cx="4022640" cy="1050840"/>
           </a:xfrm>
           <a:prstGeom prst="rect">
             <a:avLst/>
@@ -15711,7 +15393,7 @@
         <p:spPr>
           <a:xfrm>
             <a:off x="530280" y="3566160"/>
-            <a:ext cx="3657240" cy="319680"/>
+            <a:ext cx="3656880" cy="319320"/>
           </a:xfrm>
           <a:prstGeom prst="rect">
             <a:avLst/>
@@ -15766,7 +15448,7 @@
         <p:spPr>
           <a:xfrm>
             <a:off x="530280" y="3886200"/>
-            <a:ext cx="3657240" cy="273960"/>
+            <a:ext cx="3656880" cy="273600"/>
           </a:xfrm>
           <a:prstGeom prst="rect">
             <a:avLst/>
@@ -15821,7 +15503,7 @@
         <p:spPr>
           <a:xfrm>
             <a:off x="530280" y="4160520"/>
-            <a:ext cx="3657240" cy="255600"/>
+            <a:ext cx="3656880" cy="255240"/>
           </a:xfrm>
           <a:prstGeom prst="rect">
             <a:avLst/>
@@ -15876,7 +15558,7 @@
         <p:spPr>
           <a:xfrm>
             <a:off x="4709160" y="914400"/>
-            <a:ext cx="4023000" cy="1051200"/>
+            <a:ext cx="4022640" cy="1050840"/>
           </a:xfrm>
           <a:prstGeom prst="rect">
             <a:avLst/>
@@ -15907,7 +15589,7 @@
         <p:spPr>
           <a:xfrm>
             <a:off x="4873680" y="1005840"/>
-            <a:ext cx="3657240" cy="319680"/>
+            <a:ext cx="3656880" cy="319320"/>
           </a:xfrm>
           <a:prstGeom prst="rect">
             <a:avLst/>
@@ -15962,7 +15644,7 @@
         <p:spPr>
           <a:xfrm>
             <a:off x="4873680" y="1325880"/>
-            <a:ext cx="3657240" cy="273960"/>
+            <a:ext cx="3656880" cy="273600"/>
           </a:xfrm>
           <a:prstGeom prst="rect">
             <a:avLst/>
@@ -16017,7 +15699,7 @@
         <p:spPr>
           <a:xfrm>
             <a:off x="4873680" y="1600200"/>
-            <a:ext cx="3657240" cy="255600"/>
+            <a:ext cx="3656880" cy="255240"/>
           </a:xfrm>
           <a:prstGeom prst="rect">
             <a:avLst/>
@@ -16072,7 +15754,7 @@
         <p:spPr>
           <a:xfrm>
             <a:off x="4709160" y="2194560"/>
-            <a:ext cx="4023000" cy="1051200"/>
+            <a:ext cx="4022640" cy="1050840"/>
           </a:xfrm>
           <a:prstGeom prst="rect">
             <a:avLst/>
@@ -16103,7 +15785,7 @@
         <p:spPr>
           <a:xfrm>
             <a:off x="4873680" y="2286000"/>
-            <a:ext cx="3657240" cy="319680"/>
+            <a:ext cx="3656880" cy="319320"/>
           </a:xfrm>
           <a:prstGeom prst="rect">
             <a:avLst/>
@@ -16158,7 +15840,7 @@
         <p:spPr>
           <a:xfrm>
             <a:off x="4873680" y="2606040"/>
-            <a:ext cx="3657240" cy="273960"/>
+            <a:ext cx="3656880" cy="273600"/>
           </a:xfrm>
           <a:prstGeom prst="rect">
             <a:avLst/>
@@ -16213,7 +15895,7 @@
         <p:spPr>
           <a:xfrm>
             <a:off x="4873680" y="2880360"/>
-            <a:ext cx="3657240" cy="255600"/>
+            <a:ext cx="3656880" cy="255240"/>
           </a:xfrm>
           <a:prstGeom prst="rect">
             <a:avLst/>
@@ -16305,7 +15987,7 @@
         <p:spPr>
           <a:xfrm>
             <a:off x="0" y="0"/>
-            <a:ext cx="9143640" cy="54360"/>
+            <a:ext cx="9143280" cy="54000"/>
           </a:xfrm>
           <a:prstGeom prst="rect">
             <a:avLst/>
@@ -16336,7 +16018,7 @@
         <p:spPr>
           <a:xfrm>
             <a:off x="365760" y="164520"/>
-            <a:ext cx="8229240" cy="502560"/>
+            <a:ext cx="8228880" cy="502200"/>
           </a:xfrm>
           <a:prstGeom prst="rect">
             <a:avLst/>
@@ -16391,7 +16073,7 @@
         <p:spPr>
           <a:xfrm>
             <a:off x="365760" y="704160"/>
-            <a:ext cx="8412120" cy="27000"/>
+            <a:ext cx="8411760" cy="26640"/>
           </a:xfrm>
           <a:prstGeom prst="rect">
             <a:avLst/>
@@ -16422,7 +16104,7 @@
         <p:spPr>
           <a:xfrm>
             <a:off x="365760" y="914400"/>
-            <a:ext cx="4023000" cy="1279800"/>
+            <a:ext cx="4022640" cy="1279440"/>
           </a:xfrm>
           <a:prstGeom prst="rect">
             <a:avLst/>
@@ -16460,7 +16142,7 @@
         <p:spPr>
           <a:xfrm>
             <a:off x="365760" y="914400"/>
-            <a:ext cx="109440" cy="1279800"/>
+            <a:ext cx="109080" cy="1279440"/>
           </a:xfrm>
           <a:prstGeom prst="rect">
             <a:avLst/>
@@ -16491,7 +16173,7 @@
         <p:spPr>
           <a:xfrm>
             <a:off x="567000" y="1024200"/>
-            <a:ext cx="3730320" cy="255600"/>
+            <a:ext cx="3729960" cy="255240"/>
           </a:xfrm>
           <a:prstGeom prst="rect">
             <a:avLst/>
@@ -16546,7 +16228,7 @@
         <p:spPr>
           <a:xfrm>
             <a:off x="567000" y="1280160"/>
-            <a:ext cx="3730320" cy="822600"/>
+            <a:ext cx="3729960" cy="822240"/>
           </a:xfrm>
           <a:prstGeom prst="rect">
             <a:avLst/>
@@ -16601,7 +16283,7 @@
         <p:spPr>
           <a:xfrm>
             <a:off x="365760" y="2377440"/>
-            <a:ext cx="4023000" cy="1371240"/>
+            <a:ext cx="4022640" cy="1370880"/>
           </a:xfrm>
           <a:prstGeom prst="rect">
             <a:avLst/>
@@ -16632,7 +16314,7 @@
         <p:spPr>
           <a:xfrm>
             <a:off x="548640" y="2468880"/>
-            <a:ext cx="3657240" cy="319680"/>
+            <a:ext cx="3656880" cy="319320"/>
           </a:xfrm>
           <a:prstGeom prst="rect">
             <a:avLst/>
@@ -16687,7 +16369,7 @@
         <p:spPr>
           <a:xfrm>
             <a:off x="548640" y="2788920"/>
-            <a:ext cx="3657240" cy="822600"/>
+            <a:ext cx="3656880" cy="822240"/>
           </a:xfrm>
           <a:prstGeom prst="rect">
             <a:avLst/>
@@ -16766,7 +16448,7 @@
         <p:spPr>
           <a:xfrm>
             <a:off x="4754880" y="2377440"/>
-            <a:ext cx="4023000" cy="1371240"/>
+            <a:ext cx="4022640" cy="1370880"/>
           </a:xfrm>
           <a:prstGeom prst="rect">
             <a:avLst/>
@@ -16797,7 +16479,7 @@
         <p:spPr>
           <a:xfrm>
             <a:off x="4937760" y="2468880"/>
-            <a:ext cx="3657240" cy="319680"/>
+            <a:ext cx="3656880" cy="319320"/>
           </a:xfrm>
           <a:prstGeom prst="rect">
             <a:avLst/>
@@ -16852,7 +16534,7 @@
         <p:spPr>
           <a:xfrm>
             <a:off x="4937760" y="2788920"/>
-            <a:ext cx="3657240" cy="822600"/>
+            <a:ext cx="3656880" cy="822240"/>
           </a:xfrm>
           <a:prstGeom prst="rect">
             <a:avLst/>
@@ -16931,7 +16613,7 @@
         <p:spPr>
           <a:xfrm>
             <a:off x="4754880" y="914400"/>
-            <a:ext cx="4023000" cy="1279800"/>
+            <a:ext cx="4022640" cy="1279440"/>
           </a:xfrm>
           <a:prstGeom prst="rect">
             <a:avLst/>
@@ -16969,7 +16651,7 @@
         <p:spPr>
           <a:xfrm>
             <a:off x="4754880" y="914400"/>
-            <a:ext cx="109440" cy="1279800"/>
+            <a:ext cx="109080" cy="1279440"/>
           </a:xfrm>
           <a:prstGeom prst="rect">
             <a:avLst/>
@@ -17000,7 +16682,7 @@
         <p:spPr>
           <a:xfrm>
             <a:off x="4956120" y="1024200"/>
-            <a:ext cx="3730320" cy="255600"/>
+            <a:ext cx="3729960" cy="255240"/>
           </a:xfrm>
           <a:prstGeom prst="rect">
             <a:avLst/>
@@ -17055,7 +16737,7 @@
         <p:spPr>
           <a:xfrm>
             <a:off x="4956120" y="1280160"/>
-            <a:ext cx="3730320" cy="822600"/>
+            <a:ext cx="3729960" cy="822240"/>
           </a:xfrm>
           <a:prstGeom prst="rect">
             <a:avLst/>
@@ -17147,7 +16829,7 @@
         <p:spPr>
           <a:xfrm>
             <a:off x="0" y="0"/>
-            <a:ext cx="9143640" cy="54360"/>
+            <a:ext cx="9143280" cy="54000"/>
           </a:xfrm>
           <a:prstGeom prst="rect">
             <a:avLst/>
@@ -17178,7 +16860,7 @@
         <p:spPr>
           <a:xfrm>
             <a:off x="365760" y="164520"/>
-            <a:ext cx="8229240" cy="502560"/>
+            <a:ext cx="8228880" cy="502200"/>
           </a:xfrm>
           <a:prstGeom prst="rect">
             <a:avLst/>
@@ -17233,7 +16915,7 @@
         <p:spPr>
           <a:xfrm>
             <a:off x="365760" y="704160"/>
-            <a:ext cx="8412120" cy="27000"/>
+            <a:ext cx="8411760" cy="26640"/>
           </a:xfrm>
           <a:prstGeom prst="rect">
             <a:avLst/>
@@ -17264,7 +16946,7 @@
         <p:spPr>
           <a:xfrm>
             <a:off x="365760" y="914400"/>
-            <a:ext cx="4023000" cy="365400"/>
+            <a:ext cx="4022640" cy="365040"/>
           </a:xfrm>
           <a:prstGeom prst="rect">
             <a:avLst/>
@@ -17319,7 +17001,7 @@
         <p:spPr>
           <a:xfrm>
             <a:off x="365760" y="1371600"/>
-            <a:ext cx="4023000" cy="2285640"/>
+            <a:ext cx="4022640" cy="2285280"/>
           </a:xfrm>
           <a:prstGeom prst="rect">
             <a:avLst/>
@@ -17350,7 +17032,7 @@
         <p:spPr>
           <a:xfrm>
             <a:off x="502920" y="1481400"/>
-            <a:ext cx="3748680" cy="2066040"/>
+            <a:ext cx="3748320" cy="2065680"/>
           </a:xfrm>
           <a:prstGeom prst="rect">
             <a:avLst/>
@@ -17665,7 +17347,7 @@
         <p:spPr>
           <a:xfrm>
             <a:off x="4754880" y="914400"/>
-            <a:ext cx="4114440" cy="365400"/>
+            <a:ext cx="4114080" cy="365040"/>
           </a:xfrm>
           <a:prstGeom prst="rect">
             <a:avLst/>
@@ -17720,7 +17402,7 @@
         <p:spPr>
           <a:xfrm>
             <a:off x="4754880" y="1371600"/>
-            <a:ext cx="4114440" cy="2651400"/>
+            <a:ext cx="4114080" cy="2651040"/>
           </a:xfrm>
           <a:prstGeom prst="rect">
             <a:avLst/>
@@ -17751,7 +17433,7 @@
         <p:spPr>
           <a:xfrm>
             <a:off x="4892040" y="1481400"/>
-            <a:ext cx="3840120" cy="2431800"/>
+            <a:ext cx="3839760" cy="2431440"/>
           </a:xfrm>
           <a:prstGeom prst="rect">
             <a:avLst/>
@@ -18138,7 +17820,7 @@
         <p:spPr>
           <a:xfrm>
             <a:off x="365760" y="4160520"/>
-            <a:ext cx="8412120" cy="731160"/>
+            <a:ext cx="8411760" cy="730800"/>
           </a:xfrm>
           <a:prstGeom prst="rect">
             <a:avLst/>
@@ -18176,7 +17858,7 @@
         <p:spPr>
           <a:xfrm>
             <a:off x="365760" y="4160520"/>
-            <a:ext cx="109440" cy="731160"/>
+            <a:ext cx="109080" cy="730800"/>
           </a:xfrm>
           <a:prstGeom prst="rect">
             <a:avLst/>
@@ -18207,7 +17889,7 @@
         <p:spPr>
           <a:xfrm>
             <a:off x="567000" y="4270320"/>
-            <a:ext cx="8119440" cy="255600"/>
+            <a:ext cx="8119080" cy="255240"/>
           </a:xfrm>
           <a:prstGeom prst="rect">
             <a:avLst/>
@@ -18262,7 +17944,7 @@
         <p:spPr>
           <a:xfrm>
             <a:off x="567000" y="4526280"/>
-            <a:ext cx="8119440" cy="273960"/>
+            <a:ext cx="8119080" cy="273600"/>
           </a:xfrm>
           <a:prstGeom prst="rect">
             <a:avLst/>
@@ -18354,7 +18036,7 @@
         <p:spPr>
           <a:xfrm>
             <a:off x="0" y="0"/>
-            <a:ext cx="9143640" cy="54360"/>
+            <a:ext cx="9143280" cy="54000"/>
           </a:xfrm>
           <a:prstGeom prst="rect">
             <a:avLst/>
@@ -18385,7 +18067,7 @@
         <p:spPr>
           <a:xfrm>
             <a:off x="365760" y="164520"/>
-            <a:ext cx="8229240" cy="502560"/>
+            <a:ext cx="8228880" cy="502200"/>
           </a:xfrm>
           <a:prstGeom prst="rect">
             <a:avLst/>
@@ -18440,7 +18122,7 @@
         <p:spPr>
           <a:xfrm>
             <a:off x="365760" y="704160"/>
-            <a:ext cx="8412120" cy="27000"/>
+            <a:ext cx="8411760" cy="26640"/>
           </a:xfrm>
           <a:prstGeom prst="rect">
             <a:avLst/>
@@ -18471,7 +18153,7 @@
         <p:spPr>
           <a:xfrm>
             <a:off x="365760" y="868680"/>
-            <a:ext cx="8412120" cy="2834280"/>
+            <a:ext cx="8411760" cy="2833920"/>
           </a:xfrm>
           <a:prstGeom prst="rect">
             <a:avLst/>
@@ -18502,7 +18184,7 @@
         <p:spPr>
           <a:xfrm>
             <a:off x="502920" y="978480"/>
-            <a:ext cx="8137800" cy="2614680"/>
+            <a:ext cx="8137440" cy="2614320"/>
           </a:xfrm>
           <a:prstGeom prst="rect">
             <a:avLst/>
@@ -18889,7 +18571,7 @@
         <p:spPr>
           <a:xfrm>
             <a:off x="365760" y="3794760"/>
-            <a:ext cx="4023000" cy="1096920"/>
+            <a:ext cx="4022640" cy="1096560"/>
           </a:xfrm>
           <a:prstGeom prst="rect">
             <a:avLst/>
@@ -18920,7 +18602,7 @@
         <p:spPr>
           <a:xfrm>
             <a:off x="548640" y="3886200"/>
-            <a:ext cx="3657240" cy="319680"/>
+            <a:ext cx="3656880" cy="319320"/>
           </a:xfrm>
           <a:prstGeom prst="rect">
             <a:avLst/>
@@ -18975,7 +18657,7 @@
         <p:spPr>
           <a:xfrm>
             <a:off x="548640" y="4206240"/>
-            <a:ext cx="3657240" cy="594000"/>
+            <a:ext cx="3656880" cy="593640"/>
           </a:xfrm>
           <a:prstGeom prst="rect">
             <a:avLst/>
@@ -19030,7 +18712,7 @@
         <p:spPr>
           <a:xfrm>
             <a:off x="4754880" y="3794760"/>
-            <a:ext cx="4114440" cy="1096920"/>
+            <a:ext cx="4114080" cy="1096560"/>
           </a:xfrm>
           <a:prstGeom prst="rect">
             <a:avLst/>
@@ -19061,7 +18743,7 @@
         <p:spPr>
           <a:xfrm>
             <a:off x="4937760" y="3886200"/>
-            <a:ext cx="3748680" cy="319680"/>
+            <a:ext cx="3748320" cy="319320"/>
           </a:xfrm>
           <a:prstGeom prst="rect">
             <a:avLst/>
@@ -19116,7 +18798,7 @@
         <p:spPr>
           <a:xfrm>
             <a:off x="4937760" y="4206240"/>
-            <a:ext cx="3748680" cy="594000"/>
+            <a:ext cx="3748320" cy="593640"/>
           </a:xfrm>
           <a:prstGeom prst="rect">
             <a:avLst/>
@@ -19208,7 +18890,7 @@
         <p:spPr>
           <a:xfrm>
             <a:off x="0" y="0"/>
-            <a:ext cx="228240" cy="5143320"/>
+            <a:ext cx="227880" cy="5142960"/>
           </a:xfrm>
           <a:prstGeom prst="rect">
             <a:avLst/>
@@ -19239,7 +18921,7 @@
         <p:spPr>
           <a:xfrm>
             <a:off x="0" y="0"/>
-            <a:ext cx="9143640" cy="54360"/>
+            <a:ext cx="9143280" cy="54000"/>
           </a:xfrm>
           <a:prstGeom prst="rect">
             <a:avLst/>
@@ -19270,7 +18952,7 @@
         <p:spPr>
           <a:xfrm>
             <a:off x="548640" y="1097280"/>
-            <a:ext cx="7772040" cy="456840"/>
+            <a:ext cx="7771680" cy="456480"/>
           </a:xfrm>
           <a:prstGeom prst="rect">
             <a:avLst/>
@@ -19325,7 +19007,7 @@
         <p:spPr>
           <a:xfrm>
             <a:off x="548640" y="1554480"/>
-            <a:ext cx="7772040" cy="1371240"/>
+            <a:ext cx="7771680" cy="1370880"/>
           </a:xfrm>
           <a:prstGeom prst="rect">
             <a:avLst/>
@@ -19380,7 +19062,7 @@
         <p:spPr>
           <a:xfrm>
             <a:off x="548640" y="3017520"/>
-            <a:ext cx="7314840" cy="639720"/>
+            <a:ext cx="7314480" cy="639360"/>
           </a:xfrm>
           <a:prstGeom prst="rect">
             <a:avLst/>
@@ -19472,7 +19154,7 @@
         <p:spPr>
           <a:xfrm>
             <a:off x="0" y="0"/>
-            <a:ext cx="9143640" cy="54360"/>
+            <a:ext cx="9143280" cy="54000"/>
           </a:xfrm>
           <a:prstGeom prst="rect">
             <a:avLst/>
@@ -19503,7 +19185,7 @@
         <p:spPr>
           <a:xfrm>
             <a:off x="365760" y="164520"/>
-            <a:ext cx="8229240" cy="502560"/>
+            <a:ext cx="8228880" cy="502200"/>
           </a:xfrm>
           <a:prstGeom prst="rect">
             <a:avLst/>
@@ -19558,7 +19240,7 @@
         <p:spPr>
           <a:xfrm>
             <a:off x="365760" y="704160"/>
-            <a:ext cx="8412120" cy="27000"/>
+            <a:ext cx="8411760" cy="26640"/>
           </a:xfrm>
           <a:prstGeom prst="rect">
             <a:avLst/>
@@ -19589,7 +19271,7 @@
         <p:spPr>
           <a:xfrm>
             <a:off x="365760" y="914400"/>
-            <a:ext cx="4023000" cy="347040"/>
+            <a:ext cx="4022640" cy="346680"/>
           </a:xfrm>
           <a:prstGeom prst="rect">
             <a:avLst/>
@@ -19644,7 +19326,7 @@
         <p:spPr>
           <a:xfrm>
             <a:off x="365760" y="1325880"/>
-            <a:ext cx="4023000" cy="2011320"/>
+            <a:ext cx="4022640" cy="2010960"/>
           </a:xfrm>
           <a:prstGeom prst="rect">
             <a:avLst/>
@@ -19675,7 +19357,7 @@
         <p:spPr>
           <a:xfrm>
             <a:off x="502920" y="1435680"/>
-            <a:ext cx="3748680" cy="1791720"/>
+            <a:ext cx="3748320" cy="1791360"/>
           </a:xfrm>
           <a:prstGeom prst="rect">
             <a:avLst/>
@@ -19956,7 +19638,7 @@
         <p:spPr>
           <a:xfrm>
             <a:off x="365760" y="3410640"/>
-            <a:ext cx="4023000" cy="319680"/>
+            <a:ext cx="4022640" cy="319320"/>
           </a:xfrm>
           <a:prstGeom prst="rect">
             <a:avLst/>
@@ -20021,7 +19703,7 @@
         <p:spPr>
           <a:xfrm>
             <a:off x="4663440" y="914400"/>
-            <a:ext cx="4114440" cy="347040"/>
+            <a:ext cx="4114080" cy="346680"/>
           </a:xfrm>
           <a:prstGeom prst="rect">
             <a:avLst/>
@@ -20076,7 +19758,7 @@
         <p:spPr>
           <a:xfrm>
             <a:off x="4663440" y="1325880"/>
-            <a:ext cx="4114440" cy="2011320"/>
+            <a:ext cx="4114080" cy="2010960"/>
           </a:xfrm>
           <a:prstGeom prst="rect">
             <a:avLst/>
@@ -20107,7 +19789,7 @@
         <p:spPr>
           <a:xfrm>
             <a:off x="4800600" y="1435680"/>
-            <a:ext cx="3840120" cy="1791720"/>
+            <a:ext cx="3839760" cy="1791360"/>
           </a:xfrm>
           <a:prstGeom prst="rect">
             <a:avLst/>
@@ -20422,7 +20104,7 @@
         <p:spPr>
           <a:xfrm>
             <a:off x="4663440" y="3410640"/>
-            <a:ext cx="4114440" cy="319680"/>
+            <a:ext cx="4114080" cy="319320"/>
           </a:xfrm>
           <a:prstGeom prst="rect">
             <a:avLst/>
@@ -20487,7 +20169,7 @@
         <p:spPr>
           <a:xfrm>
             <a:off x="365760" y="3822120"/>
-            <a:ext cx="8412120" cy="804240"/>
+            <a:ext cx="8411760" cy="803880"/>
           </a:xfrm>
           <a:prstGeom prst="rect">
             <a:avLst/>
@@ -20525,7 +20207,7 @@
         <p:spPr>
           <a:xfrm>
             <a:off x="365760" y="3822120"/>
-            <a:ext cx="109440" cy="804240"/>
+            <a:ext cx="109080" cy="803880"/>
           </a:xfrm>
           <a:prstGeom prst="rect">
             <a:avLst/>
@@ -20556,7 +20238,7 @@
         <p:spPr>
           <a:xfrm>
             <a:off x="567000" y="3931920"/>
-            <a:ext cx="8119440" cy="255600"/>
+            <a:ext cx="8119080" cy="255240"/>
           </a:xfrm>
           <a:prstGeom prst="rect">
             <a:avLst/>
@@ -20611,7 +20293,7 @@
         <p:spPr>
           <a:xfrm>
             <a:off x="567000" y="4187880"/>
-            <a:ext cx="8119440" cy="347040"/>
+            <a:ext cx="8119080" cy="346680"/>
           </a:xfrm>
           <a:prstGeom prst="rect">
             <a:avLst/>
@@ -20703,7 +20385,7 @@
         <p:spPr>
           <a:xfrm>
             <a:off x="0" y="0"/>
-            <a:ext cx="9143640" cy="54360"/>
+            <a:ext cx="9143280" cy="54000"/>
           </a:xfrm>
           <a:prstGeom prst="rect">
             <a:avLst/>
@@ -20734,7 +20416,7 @@
         <p:spPr>
           <a:xfrm>
             <a:off x="365760" y="164520"/>
-            <a:ext cx="8229240" cy="502560"/>
+            <a:ext cx="8228880" cy="502200"/>
           </a:xfrm>
           <a:prstGeom prst="rect">
             <a:avLst/>
@@ -20789,7 +20471,7 @@
         <p:spPr>
           <a:xfrm>
             <a:off x="365760" y="704160"/>
-            <a:ext cx="8412120" cy="27000"/>
+            <a:ext cx="8411760" cy="26640"/>
           </a:xfrm>
           <a:prstGeom prst="rect">
             <a:avLst/>
@@ -20820,7 +20502,7 @@
         <p:spPr>
           <a:xfrm>
             <a:off x="365760" y="914400"/>
-            <a:ext cx="4023000" cy="347040"/>
+            <a:ext cx="4022640" cy="346680"/>
           </a:xfrm>
           <a:prstGeom prst="rect">
             <a:avLst/>
@@ -20875,7 +20557,7 @@
         <p:spPr>
           <a:xfrm>
             <a:off x="365760" y="1325880"/>
-            <a:ext cx="4023000" cy="2285640"/>
+            <a:ext cx="4022640" cy="2285280"/>
           </a:xfrm>
           <a:prstGeom prst="rect">
             <a:avLst/>
@@ -20906,7 +20588,7 @@
         <p:spPr>
           <a:xfrm>
             <a:off x="502920" y="1435680"/>
-            <a:ext cx="3748680" cy="2066040"/>
+            <a:ext cx="3748320" cy="2065680"/>
           </a:xfrm>
           <a:prstGeom prst="rect">
             <a:avLst/>
@@ -21255,7 +20937,7 @@
         <p:spPr>
           <a:xfrm>
             <a:off x="365760" y="3675960"/>
-            <a:ext cx="4023000" cy="319680"/>
+            <a:ext cx="4022640" cy="319320"/>
           </a:xfrm>
           <a:prstGeom prst="rect">
             <a:avLst/>
@@ -21320,7 +21002,7 @@
         <p:spPr>
           <a:xfrm>
             <a:off x="4663440" y="914400"/>
-            <a:ext cx="4114440" cy="347040"/>
+            <a:ext cx="4114080" cy="346680"/>
           </a:xfrm>
           <a:prstGeom prst="rect">
             <a:avLst/>
@@ -21375,7 +21057,7 @@
         <p:spPr>
           <a:xfrm>
             <a:off x="4663440" y="1325880"/>
-            <a:ext cx="4114440" cy="2285640"/>
+            <a:ext cx="4114080" cy="2285280"/>
           </a:xfrm>
           <a:prstGeom prst="rect">
             <a:avLst/>
@@ -21406,7 +21088,7 @@
         <p:spPr>
           <a:xfrm>
             <a:off x="4800600" y="1435680"/>
-            <a:ext cx="3840120" cy="2066040"/>
+            <a:ext cx="3839760" cy="2065680"/>
           </a:xfrm>
           <a:prstGeom prst="rect">
             <a:avLst/>
@@ -21745,7 +21427,7 @@
         <p:spPr>
           <a:xfrm>
             <a:off x="4663440" y="3675960"/>
-            <a:ext cx="4114440" cy="319680"/>
+            <a:ext cx="4114080" cy="319320"/>
           </a:xfrm>
           <a:prstGeom prst="rect">
             <a:avLst/>
@@ -21810,7 +21492,7 @@
         <p:spPr>
           <a:xfrm>
             <a:off x="365760" y="4069080"/>
-            <a:ext cx="8412120" cy="804240"/>
+            <a:ext cx="8411760" cy="803880"/>
           </a:xfrm>
           <a:prstGeom prst="rect">
             <a:avLst/>
@@ -21848,7 +21530,7 @@
         <p:spPr>
           <a:xfrm>
             <a:off x="365760" y="4069080"/>
-            <a:ext cx="109440" cy="804240"/>
+            <a:ext cx="109080" cy="803880"/>
           </a:xfrm>
           <a:prstGeom prst="rect">
             <a:avLst/>
@@ -21879,7 +21561,7 @@
         <p:spPr>
           <a:xfrm>
             <a:off x="567000" y="4178880"/>
-            <a:ext cx="8119440" cy="255600"/>
+            <a:ext cx="8119080" cy="255240"/>
           </a:xfrm>
           <a:prstGeom prst="rect">
             <a:avLst/>
@@ -21934,7 +21616,7 @@
         <p:spPr>
           <a:xfrm>
             <a:off x="567000" y="4434840"/>
-            <a:ext cx="8119440" cy="347040"/>
+            <a:ext cx="8119080" cy="346680"/>
           </a:xfrm>
           <a:prstGeom prst="rect">
             <a:avLst/>
@@ -22026,7 +21708,7 @@
         <p:spPr>
           <a:xfrm>
             <a:off x="0" y="0"/>
-            <a:ext cx="9143640" cy="54360"/>
+            <a:ext cx="9143280" cy="54000"/>
           </a:xfrm>
           <a:prstGeom prst="rect">
             <a:avLst/>
@@ -22057,7 +21739,7 @@
         <p:spPr>
           <a:xfrm>
             <a:off x="365760" y="164520"/>
-            <a:ext cx="8229240" cy="502560"/>
+            <a:ext cx="8228880" cy="502200"/>
           </a:xfrm>
           <a:prstGeom prst="rect">
             <a:avLst/>
@@ -22122,7 +21804,7 @@
         <p:spPr>
           <a:xfrm>
             <a:off x="365760" y="704160"/>
-            <a:ext cx="8412120" cy="27000"/>
+            <a:ext cx="8411760" cy="26640"/>
           </a:xfrm>
           <a:prstGeom prst="rect">
             <a:avLst/>
@@ -22153,7 +21835,7 @@
         <p:spPr>
           <a:xfrm>
             <a:off x="365760" y="868680"/>
-            <a:ext cx="8412120" cy="1005480"/>
+            <a:ext cx="8411760" cy="1005120"/>
           </a:xfrm>
           <a:prstGeom prst="rect">
             <a:avLst/>
@@ -22191,7 +21873,7 @@
         <p:spPr>
           <a:xfrm>
             <a:off x="365760" y="868680"/>
-            <a:ext cx="109440" cy="1005480"/>
+            <a:ext cx="109080" cy="1005120"/>
           </a:xfrm>
           <a:prstGeom prst="rect">
             <a:avLst/>
@@ -22222,7 +21904,7 @@
         <p:spPr>
           <a:xfrm>
             <a:off x="567000" y="978480"/>
-            <a:ext cx="8119440" cy="255600"/>
+            <a:ext cx="8119080" cy="255240"/>
           </a:xfrm>
           <a:prstGeom prst="rect">
             <a:avLst/>
@@ -22277,7 +21959,7 @@
         <p:spPr>
           <a:xfrm>
             <a:off x="567000" y="1234440"/>
-            <a:ext cx="8119440" cy="548280"/>
+            <a:ext cx="8119080" cy="547920"/>
           </a:xfrm>
           <a:prstGeom prst="rect">
             <a:avLst/>
@@ -22332,7 +22014,7 @@
         <p:spPr>
           <a:xfrm>
             <a:off x="365760" y="2011680"/>
-            <a:ext cx="8412120" cy="2559960"/>
+            <a:ext cx="8411760" cy="2559600"/>
           </a:xfrm>
           <a:prstGeom prst="rect">
             <a:avLst/>
@@ -22363,7 +22045,7 @@
         <p:spPr>
           <a:xfrm>
             <a:off x="502920" y="2121480"/>
-            <a:ext cx="8137800" cy="2340360"/>
+            <a:ext cx="8137440" cy="2340000"/>
           </a:xfrm>
           <a:prstGeom prst="rect">
             <a:avLst/>
@@ -22722,7 +22404,7 @@
         <p:spPr>
           <a:xfrm>
             <a:off x="365760" y="4663440"/>
-            <a:ext cx="4023000" cy="319680"/>
+            <a:ext cx="4022640" cy="319320"/>
           </a:xfrm>
           <a:prstGeom prst="rect">
             <a:avLst/>
@@ -22753,7 +22435,7 @@
         <p:spPr>
           <a:xfrm>
             <a:off x="457200" y="4681800"/>
-            <a:ext cx="3840120" cy="255600"/>
+            <a:ext cx="3839760" cy="255240"/>
           </a:xfrm>
           <a:prstGeom prst="rect">
             <a:avLst/>
@@ -22808,7 +22490,7 @@
         <p:spPr>
           <a:xfrm>
             <a:off x="4754880" y="4663440"/>
-            <a:ext cx="4114440" cy="319680"/>
+            <a:ext cx="4114080" cy="319320"/>
           </a:xfrm>
           <a:prstGeom prst="rect">
             <a:avLst/>
@@ -22839,7 +22521,7 @@
         <p:spPr>
           <a:xfrm>
             <a:off x="4846320" y="4681800"/>
-            <a:ext cx="3840120" cy="255600"/>
+            <a:ext cx="3839760" cy="255240"/>
           </a:xfrm>
           <a:prstGeom prst="rect">
             <a:avLst/>
@@ -22931,7 +22613,7 @@
         <p:spPr>
           <a:xfrm>
             <a:off x="0" y="0"/>
-            <a:ext cx="9143640" cy="54360"/>
+            <a:ext cx="9143280" cy="54000"/>
           </a:xfrm>
           <a:prstGeom prst="rect">
             <a:avLst/>
@@ -22962,7 +22644,7 @@
         <p:spPr>
           <a:xfrm>
             <a:off x="365760" y="164520"/>
-            <a:ext cx="8229240" cy="502560"/>
+            <a:ext cx="8228880" cy="502200"/>
           </a:xfrm>
           <a:prstGeom prst="rect">
             <a:avLst/>
@@ -23017,7 +22699,7 @@
         <p:spPr>
           <a:xfrm>
             <a:off x="365760" y="704160"/>
-            <a:ext cx="8412120" cy="27000"/>
+            <a:ext cx="8411760" cy="26640"/>
           </a:xfrm>
           <a:prstGeom prst="rect">
             <a:avLst/>
@@ -23048,7 +22730,7 @@
         <p:spPr>
           <a:xfrm>
             <a:off x="365760" y="914400"/>
-            <a:ext cx="4160160" cy="840960"/>
+            <a:ext cx="4159800" cy="840600"/>
           </a:xfrm>
           <a:prstGeom prst="rect">
             <a:avLst/>
@@ -23079,7 +22761,7 @@
         <p:spPr>
           <a:xfrm>
             <a:off x="365760" y="914400"/>
-            <a:ext cx="109440" cy="840960"/>
+            <a:ext cx="109080" cy="840600"/>
           </a:xfrm>
           <a:prstGeom prst="rect">
             <a:avLst/>
@@ -23110,7 +22792,7 @@
         <p:spPr>
           <a:xfrm>
             <a:off x="594360" y="960120"/>
-            <a:ext cx="3767040" cy="749520"/>
+            <a:ext cx="3766680" cy="749160"/>
           </a:xfrm>
           <a:prstGeom prst="rect">
             <a:avLst/>
@@ -23165,7 +22847,7 @@
         <p:spPr>
           <a:xfrm>
             <a:off x="365760" y="1920240"/>
-            <a:ext cx="4160160" cy="840960"/>
+            <a:ext cx="4159800" cy="840600"/>
           </a:xfrm>
           <a:prstGeom prst="rect">
             <a:avLst/>
@@ -23196,7 +22878,7 @@
         <p:spPr>
           <a:xfrm>
             <a:off x="365760" y="1920240"/>
-            <a:ext cx="109440" cy="840960"/>
+            <a:ext cx="109080" cy="840600"/>
           </a:xfrm>
           <a:prstGeom prst="rect">
             <a:avLst/>
@@ -23227,7 +22909,7 @@
         <p:spPr>
           <a:xfrm>
             <a:off x="594360" y="1965960"/>
-            <a:ext cx="3767040" cy="749520"/>
+            <a:ext cx="3766680" cy="749160"/>
           </a:xfrm>
           <a:prstGeom prst="rect">
             <a:avLst/>
@@ -23282,7 +22964,7 @@
         <p:spPr>
           <a:xfrm>
             <a:off x="365760" y="2926080"/>
-            <a:ext cx="4160160" cy="840960"/>
+            <a:ext cx="4159800" cy="840600"/>
           </a:xfrm>
           <a:prstGeom prst="rect">
             <a:avLst/>
@@ -23313,7 +22995,7 @@
         <p:spPr>
           <a:xfrm>
             <a:off x="365760" y="2926080"/>
-            <a:ext cx="109440" cy="840960"/>
+            <a:ext cx="109080" cy="840600"/>
           </a:xfrm>
           <a:prstGeom prst="rect">
             <a:avLst/>
@@ -23344,7 +23026,7 @@
         <p:spPr>
           <a:xfrm>
             <a:off x="594360" y="2971800"/>
-            <a:ext cx="3767040" cy="749520"/>
+            <a:ext cx="3766680" cy="749160"/>
           </a:xfrm>
           <a:prstGeom prst="rect">
             <a:avLst/>
@@ -23399,7 +23081,7 @@
         <p:spPr>
           <a:xfrm>
             <a:off x="365760" y="3931920"/>
-            <a:ext cx="4160160" cy="840960"/>
+            <a:ext cx="4159800" cy="840600"/>
           </a:xfrm>
           <a:prstGeom prst="rect">
             <a:avLst/>
@@ -23430,7 +23112,7 @@
         <p:spPr>
           <a:xfrm>
             <a:off x="365760" y="3931920"/>
-            <a:ext cx="109440" cy="840960"/>
+            <a:ext cx="109080" cy="840600"/>
           </a:xfrm>
           <a:prstGeom prst="rect">
             <a:avLst/>
@@ -23461,7 +23143,7 @@
         <p:spPr>
           <a:xfrm>
             <a:off x="594360" y="3977640"/>
-            <a:ext cx="3767040" cy="749520"/>
+            <a:ext cx="3766680" cy="749160"/>
           </a:xfrm>
           <a:prstGeom prst="rect">
             <a:avLst/>
@@ -23516,7 +23198,7 @@
         <p:spPr>
           <a:xfrm>
             <a:off x="4800600" y="914400"/>
-            <a:ext cx="4160160" cy="840960"/>
+            <a:ext cx="4159800" cy="840600"/>
           </a:xfrm>
           <a:prstGeom prst="rect">
             <a:avLst/>
@@ -23547,7 +23229,7 @@
         <p:spPr>
           <a:xfrm>
             <a:off x="4800600" y="914400"/>
-            <a:ext cx="109440" cy="840960"/>
+            <a:ext cx="109080" cy="840600"/>
           </a:xfrm>
           <a:prstGeom prst="rect">
             <a:avLst/>
@@ -23578,7 +23260,7 @@
         <p:spPr>
           <a:xfrm>
             <a:off x="5029200" y="960120"/>
-            <a:ext cx="3767040" cy="749520"/>
+            <a:ext cx="3766680" cy="749160"/>
           </a:xfrm>
           <a:prstGeom prst="rect">
             <a:avLst/>
@@ -23633,7 +23315,7 @@
         <p:spPr>
           <a:xfrm>
             <a:off x="4800600" y="1920240"/>
-            <a:ext cx="4160160" cy="840960"/>
+            <a:ext cx="4159800" cy="840600"/>
           </a:xfrm>
           <a:prstGeom prst="rect">
             <a:avLst/>
@@ -23664,7 +23346,7 @@
         <p:spPr>
           <a:xfrm>
             <a:off x="4800600" y="1920240"/>
-            <a:ext cx="109440" cy="840960"/>
+            <a:ext cx="109080" cy="840600"/>
           </a:xfrm>
           <a:prstGeom prst="rect">
             <a:avLst/>
@@ -23695,7 +23377,7 @@
         <p:spPr>
           <a:xfrm>
             <a:off x="5029200" y="1965960"/>
-            <a:ext cx="3767040" cy="749520"/>
+            <a:ext cx="3766680" cy="749160"/>
           </a:xfrm>
           <a:prstGeom prst="rect">
             <a:avLst/>
@@ -23750,7 +23432,7 @@
         <p:spPr>
           <a:xfrm>
             <a:off x="4800600" y="2926080"/>
-            <a:ext cx="4160160" cy="840960"/>
+            <a:ext cx="4159800" cy="840600"/>
           </a:xfrm>
           <a:prstGeom prst="rect">
             <a:avLst/>
@@ -23781,7 +23463,7 @@
         <p:spPr>
           <a:xfrm>
             <a:off x="4800600" y="2926080"/>
-            <a:ext cx="109440" cy="840960"/>
+            <a:ext cx="109080" cy="840600"/>
           </a:xfrm>
           <a:prstGeom prst="rect">
             <a:avLst/>
@@ -23812,7 +23494,7 @@
         <p:spPr>
           <a:xfrm>
             <a:off x="5029200" y="2971800"/>
-            <a:ext cx="3767040" cy="749520"/>
+            <a:ext cx="3766680" cy="749160"/>
           </a:xfrm>
           <a:prstGeom prst="rect">
             <a:avLst/>
@@ -23867,7 +23549,7 @@
         <p:spPr>
           <a:xfrm>
             <a:off x="4800600" y="3931920"/>
-            <a:ext cx="4160160" cy="840960"/>
+            <a:ext cx="4159800" cy="840600"/>
           </a:xfrm>
           <a:prstGeom prst="rect">
             <a:avLst/>
@@ -23898,7 +23580,7 @@
         <p:spPr>
           <a:xfrm>
             <a:off x="4800600" y="3931920"/>
-            <a:ext cx="109440" cy="840960"/>
+            <a:ext cx="109080" cy="840600"/>
           </a:xfrm>
           <a:prstGeom prst="rect">
             <a:avLst/>
@@ -23929,7 +23611,7 @@
         <p:spPr>
           <a:xfrm>
             <a:off x="5029200" y="3977640"/>
-            <a:ext cx="3767040" cy="749520"/>
+            <a:ext cx="3766680" cy="749160"/>
           </a:xfrm>
           <a:prstGeom prst="rect">
             <a:avLst/>
@@ -24021,7 +23703,7 @@
         <p:spPr>
           <a:xfrm>
             <a:off x="0" y="0"/>
-            <a:ext cx="9143640" cy="72720"/>
+            <a:ext cx="9143280" cy="72360"/>
           </a:xfrm>
           <a:prstGeom prst="rect">
             <a:avLst/>
@@ -24052,7 +23734,7 @@
         <p:spPr>
           <a:xfrm>
             <a:off x="5486400" y="-457200"/>
-            <a:ext cx="4571640" cy="4571640"/>
+            <a:ext cx="4571280" cy="4571280"/>
           </a:xfrm>
           <a:prstGeom prst="ellipse">
             <a:avLst/>
@@ -24085,7 +23767,7 @@
         <p:spPr>
           <a:xfrm>
             <a:off x="548640" y="548640"/>
-            <a:ext cx="5028840" cy="411120"/>
+            <a:ext cx="5028480" cy="410760"/>
           </a:xfrm>
           <a:prstGeom prst="rect">
             <a:avLst/>
@@ -24140,7 +23822,7 @@
         <p:spPr>
           <a:xfrm>
             <a:off x="548640" y="1051560"/>
-            <a:ext cx="5028840" cy="383760"/>
+            <a:ext cx="5028480" cy="383400"/>
           </a:xfrm>
           <a:prstGeom prst="rect">
             <a:avLst/>
@@ -24205,7 +23887,7 @@
         <p:spPr>
           <a:xfrm>
             <a:off x="548640" y="1554480"/>
-            <a:ext cx="5028840" cy="383760"/>
+            <a:ext cx="5028480" cy="383400"/>
           </a:xfrm>
           <a:prstGeom prst="rect">
             <a:avLst/>
@@ -24270,7 +23952,7 @@
         <p:spPr>
           <a:xfrm>
             <a:off x="548640" y="2057400"/>
-            <a:ext cx="5028840" cy="383760"/>
+            <a:ext cx="5028480" cy="383400"/>
           </a:xfrm>
           <a:prstGeom prst="rect">
             <a:avLst/>
@@ -24335,7 +24017,7 @@
         <p:spPr>
           <a:xfrm>
             <a:off x="548640" y="2560320"/>
-            <a:ext cx="5028840" cy="383760"/>
+            <a:ext cx="5028480" cy="383400"/>
           </a:xfrm>
           <a:prstGeom prst="rect">
             <a:avLst/>
@@ -24400,7 +24082,7 @@
         <p:spPr>
           <a:xfrm>
             <a:off x="548640" y="3063240"/>
-            <a:ext cx="5028840" cy="383760"/>
+            <a:ext cx="5028480" cy="383400"/>
           </a:xfrm>
           <a:prstGeom prst="rect">
             <a:avLst/>
@@ -24465,7 +24147,7 @@
         <p:spPr>
           <a:xfrm>
             <a:off x="548640" y="3566160"/>
-            <a:ext cx="5028840" cy="383760"/>
+            <a:ext cx="5028480" cy="383400"/>
           </a:xfrm>
           <a:prstGeom prst="rect">
             <a:avLst/>
@@ -24530,7 +24212,7 @@
         <p:spPr>
           <a:xfrm>
             <a:off x="548640" y="3886200"/>
-            <a:ext cx="5028840" cy="411120"/>
+            <a:ext cx="5028480" cy="410760"/>
           </a:xfrm>
           <a:prstGeom prst="rect">
             <a:avLst/>
@@ -24585,7 +24267,7 @@
         <p:spPr>
           <a:xfrm>
             <a:off x="548640" y="4389120"/>
-            <a:ext cx="5028840" cy="228240"/>
+            <a:ext cx="5028480" cy="227880"/>
           </a:xfrm>
           <a:prstGeom prst="rect">
             <a:avLst/>
@@ -24650,7 +24332,7 @@
         <p:spPr>
           <a:xfrm>
             <a:off x="548640" y="4572000"/>
-            <a:ext cx="5028840" cy="228240"/>
+            <a:ext cx="5028480" cy="227880"/>
           </a:xfrm>
           <a:prstGeom prst="rect">
             <a:avLst/>
@@ -24715,7 +24397,7 @@
         <p:spPr>
           <a:xfrm>
             <a:off x="548640" y="4754880"/>
-            <a:ext cx="5028840" cy="228240"/>
+            <a:ext cx="5028480" cy="227880"/>
           </a:xfrm>
           <a:prstGeom prst="rect">
             <a:avLst/>
@@ -24780,7 +24462,7 @@
         <p:spPr>
           <a:xfrm>
             <a:off x="548640" y="4937760"/>
-            <a:ext cx="5028840" cy="228240"/>
+            <a:ext cx="5028480" cy="227880"/>
           </a:xfrm>
           <a:prstGeom prst="rect">
             <a:avLst/>
@@ -24845,7 +24527,7 @@
         <p:spPr>
           <a:xfrm>
             <a:off x="0" y="4937760"/>
-            <a:ext cx="9143640" cy="205560"/>
+            <a:ext cx="9143280" cy="205200"/>
           </a:xfrm>
           <a:prstGeom prst="rect">
             <a:avLst/>
@@ -24876,7 +24558,7 @@
         <p:spPr>
           <a:xfrm>
             <a:off x="365760" y="4956120"/>
-            <a:ext cx="8229240" cy="182520"/>
+            <a:ext cx="8228880" cy="182160"/>
           </a:xfrm>
           <a:prstGeom prst="rect">
             <a:avLst/>
@@ -24968,7 +24650,7 @@
         <p:spPr>
           <a:xfrm>
             <a:off x="0" y="0"/>
-            <a:ext cx="228240" cy="5143320"/>
+            <a:ext cx="227880" cy="5142960"/>
           </a:xfrm>
           <a:prstGeom prst="rect">
             <a:avLst/>
@@ -24999,7 +24681,7 @@
         <p:spPr>
           <a:xfrm>
             <a:off x="0" y="0"/>
-            <a:ext cx="9143640" cy="54360"/>
+            <a:ext cx="9143280" cy="54000"/>
           </a:xfrm>
           <a:prstGeom prst="rect">
             <a:avLst/>
@@ -25030,7 +24712,7 @@
         <p:spPr>
           <a:xfrm>
             <a:off x="548640" y="1097280"/>
-            <a:ext cx="7772040" cy="456840"/>
+            <a:ext cx="7771680" cy="456480"/>
           </a:xfrm>
           <a:prstGeom prst="rect">
             <a:avLst/>
@@ -25085,7 +24767,7 @@
         <p:spPr>
           <a:xfrm>
             <a:off x="548640" y="1554480"/>
-            <a:ext cx="7772040" cy="1371240"/>
+            <a:ext cx="7771680" cy="1370880"/>
           </a:xfrm>
           <a:prstGeom prst="rect">
             <a:avLst/>
@@ -25140,7 +24822,7 @@
         <p:spPr>
           <a:xfrm>
             <a:off x="548640" y="3017520"/>
-            <a:ext cx="7314840" cy="639720"/>
+            <a:ext cx="7314480" cy="639360"/>
           </a:xfrm>
           <a:prstGeom prst="rect">
             <a:avLst/>
@@ -25232,7 +24914,7 @@
         <p:spPr>
           <a:xfrm>
             <a:off x="0" y="0"/>
-            <a:ext cx="9143640" cy="54360"/>
+            <a:ext cx="9143280" cy="54000"/>
           </a:xfrm>
           <a:prstGeom prst="rect">
             <a:avLst/>
@@ -25263,7 +24945,7 @@
         <p:spPr>
           <a:xfrm>
             <a:off x="365760" y="164520"/>
-            <a:ext cx="8229240" cy="502560"/>
+            <a:ext cx="8228880" cy="502200"/>
           </a:xfrm>
           <a:prstGeom prst="rect">
             <a:avLst/>
@@ -25318,7 +25000,7 @@
         <p:spPr>
           <a:xfrm>
             <a:off x="365760" y="704160"/>
-            <a:ext cx="8412120" cy="27000"/>
+            <a:ext cx="8411760" cy="26640"/>
           </a:xfrm>
           <a:prstGeom prst="rect">
             <a:avLst/>
@@ -25349,7 +25031,7 @@
         <p:spPr>
           <a:xfrm>
             <a:off x="365760" y="914400"/>
-            <a:ext cx="8412120" cy="1005480"/>
+            <a:ext cx="8411760" cy="1005120"/>
           </a:xfrm>
           <a:prstGeom prst="rect">
             <a:avLst/>
@@ -25387,7 +25069,7 @@
         <p:spPr>
           <a:xfrm>
             <a:off x="365760" y="914400"/>
-            <a:ext cx="109440" cy="1005480"/>
+            <a:ext cx="109080" cy="1005120"/>
           </a:xfrm>
           <a:prstGeom prst="rect">
             <a:avLst/>
@@ -25418,7 +25100,7 @@
         <p:spPr>
           <a:xfrm>
             <a:off x="567000" y="1024200"/>
-            <a:ext cx="8119440" cy="255600"/>
+            <a:ext cx="8119080" cy="255240"/>
           </a:xfrm>
           <a:prstGeom prst="rect">
             <a:avLst/>
@@ -25473,7 +25155,7 @@
         <p:spPr>
           <a:xfrm>
             <a:off x="567000" y="1280160"/>
-            <a:ext cx="8119440" cy="548280"/>
+            <a:ext cx="8119080" cy="547920"/>
           </a:xfrm>
           <a:prstGeom prst="rect">
             <a:avLst/>
@@ -25528,7 +25210,7 @@
         <p:spPr>
           <a:xfrm>
             <a:off x="365760" y="2103120"/>
-            <a:ext cx="8412120" cy="319680"/>
+            <a:ext cx="8411760" cy="319320"/>
           </a:xfrm>
           <a:prstGeom prst="rect">
             <a:avLst/>
@@ -25583,7 +25265,7 @@
         <p:spPr>
           <a:xfrm>
             <a:off x="365760" y="2468880"/>
-            <a:ext cx="8412120" cy="1279800"/>
+            <a:ext cx="8411760" cy="1279440"/>
           </a:xfrm>
           <a:prstGeom prst="rect">
             <a:avLst/>
@@ -25611,7 +25293,7 @@
               <a:buClr>
                 <a:srgbClr val="e8f4f8"/>
               </a:buClr>
-              <a:buFont typeface="Symbol" charset="2"/>
+              <a:buFont typeface="Symbol"/>
               <a:buChar char=""/>
             </a:pPr>
             <a:r>
@@ -25636,7 +25318,7 @@
               <a:buClr>
                 <a:srgbClr val="e8f4f8"/>
               </a:buClr>
-              <a:buFont typeface="Symbol" charset="2"/>
+              <a:buFont typeface="Symbol"/>
               <a:buChar char=""/>
             </a:pPr>
             <a:r>
@@ -25661,7 +25343,7 @@
               <a:buClr>
                 <a:srgbClr val="e8f4f8"/>
               </a:buClr>
-              <a:buFont typeface="Symbol" charset="2"/>
+              <a:buFont typeface="Symbol"/>
               <a:buChar char=""/>
             </a:pPr>
             <a:r>
@@ -25689,7 +25371,7 @@
         <p:spPr>
           <a:xfrm>
             <a:off x="365760" y="3840480"/>
-            <a:ext cx="8412120" cy="1005480"/>
+            <a:ext cx="8411760" cy="1005120"/>
           </a:xfrm>
           <a:prstGeom prst="rect">
             <a:avLst/>
@@ -25727,7 +25409,7 @@
         <p:spPr>
           <a:xfrm>
             <a:off x="365760" y="3840480"/>
-            <a:ext cx="109440" cy="1005480"/>
+            <a:ext cx="109080" cy="1005120"/>
           </a:xfrm>
           <a:prstGeom prst="rect">
             <a:avLst/>
@@ -25758,7 +25440,7 @@
         <p:spPr>
           <a:xfrm>
             <a:off x="567000" y="3950280"/>
-            <a:ext cx="8119440" cy="255600"/>
+            <a:ext cx="8119080" cy="255240"/>
           </a:xfrm>
           <a:prstGeom prst="rect">
             <a:avLst/>
@@ -25813,7 +25495,7 @@
         <p:spPr>
           <a:xfrm>
             <a:off x="567000" y="4206240"/>
-            <a:ext cx="8119440" cy="548280"/>
+            <a:ext cx="8119080" cy="547920"/>
           </a:xfrm>
           <a:prstGeom prst="rect">
             <a:avLst/>
@@ -25929,7 +25611,7 @@
         <p:spPr>
           <a:xfrm>
             <a:off x="0" y="0"/>
-            <a:ext cx="9143640" cy="54360"/>
+            <a:ext cx="9143280" cy="54000"/>
           </a:xfrm>
           <a:prstGeom prst="rect">
             <a:avLst/>
@@ -25960,7 +25642,7 @@
         <p:spPr>
           <a:xfrm>
             <a:off x="365760" y="164520"/>
-            <a:ext cx="8229240" cy="502560"/>
+            <a:ext cx="8228880" cy="502200"/>
           </a:xfrm>
           <a:prstGeom prst="rect">
             <a:avLst/>
@@ -26015,7 +25697,7 @@
         <p:spPr>
           <a:xfrm>
             <a:off x="365760" y="704160"/>
-            <a:ext cx="8412120" cy="27000"/>
+            <a:ext cx="8411760" cy="26640"/>
           </a:xfrm>
           <a:prstGeom prst="rect">
             <a:avLst/>
@@ -26046,7 +25728,7 @@
         <p:spPr>
           <a:xfrm>
             <a:off x="365760" y="822960"/>
-            <a:ext cx="4937400" cy="3291480"/>
+            <a:ext cx="4937040" cy="3291120"/>
           </a:xfrm>
           <a:prstGeom prst="rect">
             <a:avLst/>
@@ -26077,7 +25759,7 @@
         <p:spPr>
           <a:xfrm>
             <a:off x="502920" y="932760"/>
-            <a:ext cx="4663080" cy="3071880"/>
+            <a:ext cx="4662720" cy="3071520"/>
           </a:xfrm>
           <a:prstGeom prst="rect">
             <a:avLst/>
@@ -26592,7 +26274,7 @@
         <p:spPr>
           <a:xfrm>
             <a:off x="5577840" y="914400"/>
-            <a:ext cx="3291480" cy="319680"/>
+            <a:ext cx="3291120" cy="319320"/>
           </a:xfrm>
           <a:prstGeom prst="rect">
             <a:avLst/>
@@ -26647,7 +26329,7 @@
         <p:spPr>
           <a:xfrm>
             <a:off x="5577840" y="1325880"/>
-            <a:ext cx="273960" cy="365400"/>
+            <a:ext cx="273600" cy="365040"/>
           </a:xfrm>
           <a:prstGeom prst="rect">
             <a:avLst/>
@@ -26678,7 +26360,7 @@
         <p:spPr>
           <a:xfrm>
             <a:off x="5943600" y="1325880"/>
-            <a:ext cx="2834280" cy="456840"/>
+            <a:ext cx="2833920" cy="456480"/>
           </a:xfrm>
           <a:prstGeom prst="rect">
             <a:avLst/>
@@ -26733,7 +26415,7 @@
         <p:spPr>
           <a:xfrm>
             <a:off x="5577840" y="1965960"/>
-            <a:ext cx="273960" cy="365400"/>
+            <a:ext cx="273600" cy="365040"/>
           </a:xfrm>
           <a:prstGeom prst="rect">
             <a:avLst/>
@@ -26764,7 +26446,7 @@
         <p:spPr>
           <a:xfrm>
             <a:off x="5943600" y="1965960"/>
-            <a:ext cx="2834280" cy="456840"/>
+            <a:ext cx="2833920" cy="456480"/>
           </a:xfrm>
           <a:prstGeom prst="rect">
             <a:avLst/>
@@ -26819,7 +26501,7 @@
         <p:spPr>
           <a:xfrm>
             <a:off x="5577840" y="2606040"/>
-            <a:ext cx="273960" cy="365400"/>
+            <a:ext cx="273600" cy="365040"/>
           </a:xfrm>
           <a:prstGeom prst="rect">
             <a:avLst/>
@@ -26850,7 +26532,7 @@
         <p:spPr>
           <a:xfrm>
             <a:off x="5943600" y="2606040"/>
-            <a:ext cx="2834280" cy="456840"/>
+            <a:ext cx="2833920" cy="456480"/>
           </a:xfrm>
           <a:prstGeom prst="rect">
             <a:avLst/>
@@ -26905,7 +26587,7 @@
         <p:spPr>
           <a:xfrm>
             <a:off x="5577840" y="3246120"/>
-            <a:ext cx="273960" cy="365400"/>
+            <a:ext cx="273600" cy="365040"/>
           </a:xfrm>
           <a:prstGeom prst="rect">
             <a:avLst/>
@@ -26936,7 +26618,7 @@
         <p:spPr>
           <a:xfrm>
             <a:off x="5943600" y="3246120"/>
-            <a:ext cx="2834280" cy="456840"/>
+            <a:ext cx="2833920" cy="456480"/>
           </a:xfrm>
           <a:prstGeom prst="rect">
             <a:avLst/>
@@ -26990,8 +26672,8 @@
         </p:nvSpPr>
         <p:spPr>
           <a:xfrm>
-            <a:off x="5577840" y="3977640"/>
-            <a:ext cx="3242160" cy="1782360"/>
+            <a:off x="358200" y="4338000"/>
+            <a:ext cx="3241800" cy="1782000"/>
           </a:xfrm>
           <a:prstGeom prst="rect">
             <a:avLst/>
@@ -27021,8 +26703,8 @@
         </p:nvSpPr>
         <p:spPr>
           <a:xfrm>
-            <a:off x="5715000" y="4087440"/>
-            <a:ext cx="3017160" cy="785880"/>
+            <a:off x="403200" y="4434480"/>
+            <a:ext cx="3016800" cy="785520"/>
           </a:xfrm>
           <a:prstGeom prst="rect">
             <a:avLst/>
@@ -27282,7 +26964,7 @@
         <p:spPr>
           <a:xfrm>
             <a:off x="0" y="0"/>
-            <a:ext cx="9143640" cy="54360"/>
+            <a:ext cx="9143280" cy="54000"/>
           </a:xfrm>
           <a:prstGeom prst="rect">
             <a:avLst/>
@@ -27313,7 +26995,7 @@
         <p:spPr>
           <a:xfrm>
             <a:off x="365760" y="164520"/>
-            <a:ext cx="8229240" cy="502560"/>
+            <a:ext cx="8228880" cy="502200"/>
           </a:xfrm>
           <a:prstGeom prst="rect">
             <a:avLst/>
@@ -27368,7 +27050,7 @@
         <p:spPr>
           <a:xfrm>
             <a:off x="365760" y="704160"/>
-            <a:ext cx="8412120" cy="27000"/>
+            <a:ext cx="8411760" cy="26640"/>
           </a:xfrm>
           <a:prstGeom prst="rect">
             <a:avLst/>
@@ -27399,7 +27081,7 @@
         <p:spPr>
           <a:xfrm>
             <a:off x="365760" y="868680"/>
-            <a:ext cx="8412120" cy="411120"/>
+            <a:ext cx="8411760" cy="410760"/>
           </a:xfrm>
           <a:prstGeom prst="rect">
             <a:avLst/>
@@ -27454,7 +27136,7 @@
         <p:spPr>
           <a:xfrm>
             <a:off x="365760" y="1371600"/>
-            <a:ext cx="3931560" cy="914040"/>
+            <a:ext cx="3931200" cy="913680"/>
           </a:xfrm>
           <a:prstGeom prst="rect">
             <a:avLst/>
@@ -27485,7 +27167,7 @@
         <p:spPr>
           <a:xfrm>
             <a:off x="548640" y="1417320"/>
-            <a:ext cx="3657240" cy="822600"/>
+            <a:ext cx="3656880" cy="822240"/>
           </a:xfrm>
           <a:prstGeom prst="rect">
             <a:avLst/>
@@ -27550,7 +27232,7 @@
         <p:spPr>
           <a:xfrm>
             <a:off x="4572000" y="1371600"/>
-            <a:ext cx="4205880" cy="914040"/>
+            <a:ext cx="4205520" cy="913680"/>
           </a:xfrm>
           <a:prstGeom prst="rect">
             <a:avLst/>
@@ -27581,7 +27263,7 @@
         <p:spPr>
           <a:xfrm>
             <a:off x="4754880" y="1417320"/>
-            <a:ext cx="3840120" cy="822600"/>
+            <a:ext cx="3839760" cy="822240"/>
           </a:xfrm>
           <a:prstGeom prst="rect">
             <a:avLst/>
@@ -27646,7 +27328,7 @@
         <p:spPr>
           <a:xfrm>
             <a:off x="365760" y="2423160"/>
-            <a:ext cx="8412120" cy="2468520"/>
+            <a:ext cx="8411760" cy="2468160"/>
           </a:xfrm>
           <a:prstGeom prst="rect">
             <a:avLst/>
@@ -27677,7 +27359,7 @@
         <p:spPr>
           <a:xfrm>
             <a:off x="502920" y="2532960"/>
-            <a:ext cx="8137800" cy="2248920"/>
+            <a:ext cx="8137440" cy="2248560"/>
           </a:xfrm>
           <a:prstGeom prst="rect">
             <a:avLst/>
@@ -28127,7 +27809,7 @@
         <p:spPr>
           <a:xfrm>
             <a:off x="0" y="0"/>
-            <a:ext cx="9143640" cy="54360"/>
+            <a:ext cx="9143280" cy="54000"/>
           </a:xfrm>
           <a:prstGeom prst="rect">
             <a:avLst/>
@@ -28158,7 +27840,7 @@
         <p:spPr>
           <a:xfrm>
             <a:off x="365760" y="164520"/>
-            <a:ext cx="8229240" cy="502560"/>
+            <a:ext cx="8228880" cy="502200"/>
           </a:xfrm>
           <a:prstGeom prst="rect">
             <a:avLst/>
@@ -28213,7 +27895,7 @@
         <p:spPr>
           <a:xfrm>
             <a:off x="365760" y="704160"/>
-            <a:ext cx="8412120" cy="27000"/>
+            <a:ext cx="8411760" cy="26640"/>
           </a:xfrm>
           <a:prstGeom prst="rect">
             <a:avLst/>
@@ -28244,7 +27926,7 @@
         <p:spPr>
           <a:xfrm>
             <a:off x="365760" y="868680"/>
-            <a:ext cx="8412120" cy="1051200"/>
+            <a:ext cx="8411760" cy="1050840"/>
           </a:xfrm>
           <a:prstGeom prst="rect">
             <a:avLst/>
@@ -28282,7 +27964,7 @@
         <p:spPr>
           <a:xfrm>
             <a:off x="365760" y="868680"/>
-            <a:ext cx="109440" cy="1051200"/>
+            <a:ext cx="109080" cy="1050840"/>
           </a:xfrm>
           <a:prstGeom prst="rect">
             <a:avLst/>
@@ -28313,7 +27995,7 @@
         <p:spPr>
           <a:xfrm>
             <a:off x="567000" y="978480"/>
-            <a:ext cx="8119440" cy="255600"/>
+            <a:ext cx="8119080" cy="255240"/>
           </a:xfrm>
           <a:prstGeom prst="rect">
             <a:avLst/>
@@ -28368,7 +28050,7 @@
         <p:spPr>
           <a:xfrm>
             <a:off x="567000" y="1234440"/>
-            <a:ext cx="8119440" cy="594000"/>
+            <a:ext cx="8119080" cy="593640"/>
           </a:xfrm>
           <a:prstGeom prst="rect">
             <a:avLst/>
@@ -28423,7 +28105,7 @@
         <p:spPr>
           <a:xfrm>
             <a:off x="365760" y="2057400"/>
-            <a:ext cx="8412120" cy="2559960"/>
+            <a:ext cx="8411760" cy="2559600"/>
           </a:xfrm>
           <a:prstGeom prst="rect">
             <a:avLst/>
@@ -28454,7 +28136,7 @@
         <p:spPr>
           <a:xfrm>
             <a:off x="502920" y="2167200"/>
-            <a:ext cx="8137800" cy="2340360"/>
+            <a:ext cx="8137440" cy="2340000"/>
           </a:xfrm>
           <a:prstGeom prst="rect">
             <a:avLst/>
@@ -28881,7 +28563,7 @@
         <p:spPr>
           <a:xfrm>
             <a:off x="365760" y="4663440"/>
-            <a:ext cx="8412120" cy="319680"/>
+            <a:ext cx="8411760" cy="319320"/>
           </a:xfrm>
           <a:prstGeom prst="rect">
             <a:avLst/>
@@ -28983,7 +28665,7 @@
         <p:spPr>
           <a:xfrm>
             <a:off x="0" y="0"/>
-            <a:ext cx="228240" cy="5143320"/>
+            <a:ext cx="227880" cy="5142960"/>
           </a:xfrm>
           <a:prstGeom prst="rect">
             <a:avLst/>
@@ -29014,7 +28696,7 @@
         <p:spPr>
           <a:xfrm>
             <a:off x="0" y="0"/>
-            <a:ext cx="9143640" cy="54360"/>
+            <a:ext cx="9143280" cy="54000"/>
           </a:xfrm>
           <a:prstGeom prst="rect">
             <a:avLst/>
@@ -29045,7 +28727,7 @@
         <p:spPr>
           <a:xfrm>
             <a:off x="548640" y="1097280"/>
-            <a:ext cx="7772040" cy="456840"/>
+            <a:ext cx="7771680" cy="456480"/>
           </a:xfrm>
           <a:prstGeom prst="rect">
             <a:avLst/>
@@ -29100,7 +28782,7 @@
         <p:spPr>
           <a:xfrm>
             <a:off x="548640" y="1554480"/>
-            <a:ext cx="7772040" cy="1371240"/>
+            <a:ext cx="7771680" cy="1370880"/>
           </a:xfrm>
           <a:prstGeom prst="rect">
             <a:avLst/>
@@ -29155,7 +28837,7 @@
         <p:spPr>
           <a:xfrm>
             <a:off x="548640" y="3017520"/>
-            <a:ext cx="7314840" cy="639720"/>
+            <a:ext cx="7314480" cy="639360"/>
           </a:xfrm>
           <a:prstGeom prst="rect">
             <a:avLst/>
@@ -29247,7 +28929,7 @@
         <p:spPr>
           <a:xfrm>
             <a:off x="0" y="0"/>
-            <a:ext cx="9143640" cy="54360"/>
+            <a:ext cx="9143280" cy="54000"/>
           </a:xfrm>
           <a:prstGeom prst="rect">
             <a:avLst/>
@@ -29278,7 +28960,7 @@
         <p:spPr>
           <a:xfrm>
             <a:off x="365760" y="164520"/>
-            <a:ext cx="8229240" cy="502560"/>
+            <a:ext cx="8228880" cy="502200"/>
           </a:xfrm>
           <a:prstGeom prst="rect">
             <a:avLst/>
@@ -29333,7 +29015,7 @@
         <p:spPr>
           <a:xfrm>
             <a:off x="365760" y="704160"/>
-            <a:ext cx="8412120" cy="27000"/>
+            <a:ext cx="8411760" cy="26640"/>
           </a:xfrm>
           <a:prstGeom prst="rect">
             <a:avLst/>
@@ -29364,7 +29046,7 @@
         <p:spPr>
           <a:xfrm>
             <a:off x="365760" y="914400"/>
-            <a:ext cx="8412120" cy="1005480"/>
+            <a:ext cx="8411760" cy="1005120"/>
           </a:xfrm>
           <a:prstGeom prst="rect">
             <a:avLst/>
@@ -29402,7 +29084,7 @@
         <p:spPr>
           <a:xfrm>
             <a:off x="365760" y="914400"/>
-            <a:ext cx="109440" cy="1005480"/>
+            <a:ext cx="109080" cy="1005120"/>
           </a:xfrm>
           <a:prstGeom prst="rect">
             <a:avLst/>
@@ -29433,7 +29115,7 @@
         <p:spPr>
           <a:xfrm>
             <a:off x="567000" y="1024200"/>
-            <a:ext cx="8119440" cy="255600"/>
+            <a:ext cx="8119080" cy="255240"/>
           </a:xfrm>
           <a:prstGeom prst="rect">
             <a:avLst/>
@@ -29488,7 +29170,7 @@
         <p:spPr>
           <a:xfrm>
             <a:off x="567000" y="1280160"/>
-            <a:ext cx="8119440" cy="548280"/>
+            <a:ext cx="8119080" cy="547920"/>
           </a:xfrm>
           <a:prstGeom prst="rect">
             <a:avLst/>
@@ -29543,7 +29225,7 @@
         <p:spPr>
           <a:xfrm>
             <a:off x="365760" y="2103120"/>
-            <a:ext cx="2651400" cy="1554120"/>
+            <a:ext cx="2651040" cy="1553760"/>
           </a:xfrm>
           <a:prstGeom prst="rect">
             <a:avLst/>
@@ -29574,7 +29256,7 @@
         <p:spPr>
           <a:xfrm>
             <a:off x="502920" y="2240280"/>
-            <a:ext cx="2377080" cy="365400"/>
+            <a:ext cx="2376720" cy="365040"/>
           </a:xfrm>
           <a:prstGeom prst="rect">
             <a:avLst/>
@@ -29629,7 +29311,7 @@
         <p:spPr>
           <a:xfrm>
             <a:off x="502920" y="2606040"/>
-            <a:ext cx="2377080" cy="914040"/>
+            <a:ext cx="2376720" cy="913680"/>
           </a:xfrm>
           <a:prstGeom prst="rect">
             <a:avLst/>
@@ -29708,7 +29390,7 @@
         <p:spPr>
           <a:xfrm>
             <a:off x="3200400" y="2103120"/>
-            <a:ext cx="2651400" cy="1554120"/>
+            <a:ext cx="2651040" cy="1553760"/>
           </a:xfrm>
           <a:prstGeom prst="rect">
             <a:avLst/>
@@ -29739,7 +29421,7 @@
         <p:spPr>
           <a:xfrm>
             <a:off x="3337560" y="2240280"/>
-            <a:ext cx="2377080" cy="365400"/>
+            <a:ext cx="2376720" cy="365040"/>
           </a:xfrm>
           <a:prstGeom prst="rect">
             <a:avLst/>
@@ -29794,7 +29476,7 @@
         <p:spPr>
           <a:xfrm>
             <a:off x="3337560" y="2606040"/>
-            <a:ext cx="2377080" cy="914040"/>
+            <a:ext cx="2376720" cy="913680"/>
           </a:xfrm>
           <a:prstGeom prst="rect">
             <a:avLst/>
@@ -29873,7 +29555,7 @@
         <p:spPr>
           <a:xfrm>
             <a:off x="6035040" y="2103120"/>
-            <a:ext cx="2651400" cy="1554120"/>
+            <a:ext cx="2651040" cy="1553760"/>
           </a:xfrm>
           <a:prstGeom prst="rect">
             <a:avLst/>
@@ -29904,7 +29586,7 @@
         <p:spPr>
           <a:xfrm>
             <a:off x="6172200" y="2240280"/>
-            <a:ext cx="2377080" cy="365400"/>
+            <a:ext cx="2376720" cy="365040"/>
           </a:xfrm>
           <a:prstGeom prst="rect">
             <a:avLst/>
@@ -29959,7 +29641,7 @@
         <p:spPr>
           <a:xfrm>
             <a:off x="6172200" y="2606040"/>
-            <a:ext cx="2377080" cy="914040"/>
+            <a:ext cx="2376720" cy="913680"/>
           </a:xfrm>
           <a:prstGeom prst="rect">
             <a:avLst/>
@@ -30038,7 +29720,7 @@
         <p:spPr>
           <a:xfrm>
             <a:off x="365760" y="3840480"/>
-            <a:ext cx="8412120" cy="1005480"/>
+            <a:ext cx="8411760" cy="1005120"/>
           </a:xfrm>
           <a:prstGeom prst="rect">
             <a:avLst/>
@@ -30076,7 +29758,7 @@
         <p:spPr>
           <a:xfrm>
             <a:off x="365760" y="3840480"/>
-            <a:ext cx="109440" cy="1005480"/>
+            <a:ext cx="109080" cy="1005120"/>
           </a:xfrm>
           <a:prstGeom prst="rect">
             <a:avLst/>
@@ -30107,7 +29789,7 @@
         <p:spPr>
           <a:xfrm>
             <a:off x="567000" y="3950280"/>
-            <a:ext cx="8119440" cy="255600"/>
+            <a:ext cx="8119080" cy="255240"/>
           </a:xfrm>
           <a:prstGeom prst="rect">
             <a:avLst/>
@@ -30162,7 +29844,7 @@
         <p:spPr>
           <a:xfrm>
             <a:off x="567000" y="4206240"/>
-            <a:ext cx="8119440" cy="548280"/>
+            <a:ext cx="8119080" cy="547920"/>
           </a:xfrm>
           <a:prstGeom prst="rect">
             <a:avLst/>
